--- a/outputs/NextPhase_Plan_ORBm_BMAp_TRAP.pptx
+++ b/outputs/NextPhase_Plan_ORBm_BMAp_TRAP.pptx
@@ -21,6 +21,7 @@
     <p:sldId id="269" r:id="rId20"/>
     <p:sldId id="270" r:id="rId21"/>
     <p:sldId id="271" r:id="rId22"/>
+    <p:sldId id="272" r:id="rId23"/>
   </p:sldIdLst>
   <p:sldSz cx="12191695" cy="6858000" type="screen4x3"/>
   <p:notesSz cx="6858000" cy="9144000"/>
@@ -3457,7 +3458,7 @@
                   <a:srgbClr val="595959"/>
                 </a:solidFill>
               </a:rPr>
-              <a:t>2.  Approval to order the custom probe panel in October once pilot QC passes.</a:t>
+              <a:t>2.  Approval to order the panel in October: base Mouse Brain panel plus an add-on. I have matched our gene list against the real base panel, and it needs only 51 of the 100 custom slots, so this is the cheaper of the two routes.</a:t>
             </a:r>
           </a:p>
           <a:p>
@@ -9243,7 +9244,7 @@
             <a:avLst/>
           </a:prstGeom>
           <a:solidFill>
-            <a:srgbClr val="9C6300"/>
+            <a:srgbClr val="1E6F3C"/>
           </a:solidFill>
           <a:ln>
             <a:noFill/>
@@ -9282,7 +9283,7 @@
                   <a:srgbClr val="FFFFFF"/>
                 </a:solidFill>
               </a:rPr>
-              <a:t>OPEN QUESTION I NEED HELP WITH</a:t>
+              <a:t>HOUSING — RESOLVED, SINGLE CAGE</a:t>
             </a:r>
           </a:p>
         </p:txBody>
@@ -9343,7 +9344,7 @@
                   <a:srgbClr val="595959"/>
                 </a:solidFill>
               </a:rPr>
-              <a:t>The TRAP2 protocol single-houses mice for 48 h before tagging, to keep background labelling low.</a:t>
+              <a:t>I had flagged a possible conflict with the yoked design. There is none: yoking is implemented in software, by replaying the Active partner's reward log into a separate Passive session, so partners never share a box.</a:t>
             </a:r>
           </a:p>
           <a:p>
@@ -9361,7 +9362,7 @@
                   <a:srgbClr val="595959"/>
                 </a:solidFill>
               </a:rPr>
-              <a:t>Our yoked design pairs each Active with a Passive partner. If yoking requires them to be co-housed on day 12, we cannot single-house them.</a:t>
+              <a:t>So we single-house from day 10 at no cost to the paradigm — and the paradigm runs in the operant rig, not the home cage, so the apparatus is unchanged too.</a:t>
             </a:r>
           </a:p>
           <a:p>
@@ -9379,7 +9380,7 @@
                   <a:srgbClr val="1F3B63"/>
                 </a:solidFill>
               </a:rPr>
-              <a:t>Fallback: keep normal housing, treat both groups identically, and measure the background with the home-cage 4-OHT control rather than trying to eliminate it.</a:t>
+              <a:t>Applied identically to Active, Passive and control, and started 48 h ahead so the isolation itself is not the salient event being tagged.</a:t>
             </a:r>
           </a:p>
         </p:txBody>
@@ -9420,7 +9421,7 @@
                   <a:srgbClr val="595959"/>
                 </a:solidFill>
               </a:rPr>
-              <a:t>CNO reverse metabolism: Gomez et al. 2017 Science; Manvich et al. 2018 Sci Rep. DCZ: Nagai et al. 2020 Nat Neurosci.</a:t>
+              <a:t>CNO reverse metabolism: Gomez et al. 2017 Science; Manvich et al. 2018 Sci Rep. DCZ: Nagai et al. 2020 Nat Neurosci. Yoking implementation: MicroLogReplayExperiment, experiments/ratio_tasks.py.</a:t>
             </a:r>
           </a:p>
         </p:txBody>
@@ -13413,7 +13414,7 @@
                   <a:srgbClr val="595959"/>
                 </a:solidFill>
               </a:rPr>
-              <a:t>1.  Budget route for the panel: Xenium Prime 5K base, or base panel plus a 100-gene add-on. This changes what I can order in October.</a:t>
+              <a:t>1.  Which region first for chemogenetics. I recommend ORBm — larger effect in the screen, easier bilateral target, and cortex is more forgiving of spread.</a:t>
             </a:r>
           </a:p>
           <a:p>
@@ -13431,7 +13432,7 @@
                   <a:srgbClr val="595959"/>
                 </a:solidFill>
               </a:rPr>
-              <a:t>2.  Which region first for chemogenetics. I recommend ORBm — larger effect in the screen, easier bilateral target, and cortex is more forgiving of spread.</a:t>
+              <a:t>2.  Group sizes: do you accept cohort 1 as an explicitly underpowered expression pilot, with the powered cohort gated on its result?</a:t>
             </a:r>
           </a:p>
           <a:p>
@@ -13449,7 +13450,7 @@
                   <a:srgbClr val="595959"/>
                 </a:solidFill>
               </a:rPr>
-              <a:t>3.  Group sizes: do you accept cohort 1 as an explicitly underpowered expression pilot, with the powered cohort gated on its result?</a:t>
+              <a:t>3.  Sex. The behaviour cohort was 7 female / 7 male with within-sex yoked pairs, but sex is not recorded for the first 8 TRAP mice. I would balance sex in the powered cohort rather than in the pilot.</a:t>
             </a:r>
           </a:p>
           <a:p>
@@ -13467,7 +13468,7 @@
                   <a:srgbClr val="595959"/>
                 </a:solidFill>
               </a:rPr>
-              <a:t>4.  Housing on the tagging day — whether the yoked design can tolerate 48 h of single housing before day 12, or whether we measure background instead.</a:t>
+              <a:t>4.  Whether to start the TRAP2 × R26-hM4Di cross now, so the within-Post question is answerable in 2027.</a:t>
             </a:r>
           </a:p>
           <a:p>
@@ -13480,30 +13481,12 @@
               </a:spcAft>
             </a:pPr>
             <a:r>
-              <a:rPr sz="1150" b="0">
-                <a:solidFill>
-                  <a:srgbClr val="595959"/>
+              <a:rPr sz="1150" b="1">
+                <a:solidFill>
+                  <a:srgbClr val="1F3B63"/>
                 </a:solidFill>
               </a:rPr>
-              <a:t>5.  Sex as a variable. The current cohort needs checking; if it is male-only I would like to add females to the powered cohort rather than to the pilot.</a:t>
-            </a:r>
-          </a:p>
-          <a:p>
-            <a:pPr algn="l">
-              <a:lnSpc>
-                <a:spcPct val="97000"/>
-              </a:lnSpc>
-              <a:spcAft>
-                <a:spcPts val="500"/>
-              </a:spcAft>
-            </a:pPr>
-            <a:r>
-              <a:rPr sz="1150" b="0">
-                <a:solidFill>
-                  <a:srgbClr val="595959"/>
-                </a:solidFill>
-              </a:rPr>
-              <a:t>6.  Whether to start the TRAP2 × R26-hM4Di cross now, so the within-Post question is answerable in 2027.</a:t>
+              <a:t>5.  Two records I could not find anywhere in the code, manifests or notes, and need from the lab: the housing condition and the exact 4-OHT protocol used for the existing 20-mouse TRAP cohort.</a:t>
             </a:r>
           </a:p>
         </p:txBody>
@@ -13618,12 +13601,12 @@
               </a:spcAft>
             </a:pPr>
             <a:r>
-              <a:rPr sz="1150" b="0">
-                <a:solidFill>
-                  <a:srgbClr val="595959"/>
+              <a:rPr sz="1150" b="1">
+                <a:solidFill>
+                  <a:srgbClr val="1F3B63"/>
                 </a:solidFill>
               </a:rPr>
-              <a:t>Custom transgene probes are not validated by 10x. If tdTomato detection is weak, iCre gives a second independent readout of the same cells, and immunostaining on adjacent sections is the fallback.</a:t>
+              <a:t>If the existing TRAP cohort was group-housed, its labelling baseline differs from the single-housed cohort, and the Xenium result is not strictly comparable to the density screen that chose these two regions. Mitigation: the home-cage 4-OHT control measures the new baseline directly, so the comparison can be corrected rather than lost.</a:t>
             </a:r>
           </a:p>
           <a:p>
@@ -13641,7 +13624,7 @@
                   <a:srgbClr val="595959"/>
                 </a:solidFill>
               </a:rPr>
-              <a:t>BMAp is small and next to MEA, BLA and the sAMY-like GABA populations. Mitigation: small injection volume, and every mouse verified histologically against the subclass markers from the panel work.</a:t>
+              <a:t>Custom transgene probes are not validated by 10x. If tdTomato detection is weak, iCre gives a second independent readout of the same cells, and immunostaining on adjacent sections is the fallback.</a:t>
             </a:r>
           </a:p>
           <a:p>
@@ -13659,7 +13642,7 @@
                   <a:srgbClr val="595959"/>
                 </a:solidFill>
               </a:rPr>
-              <a:t>Our Post ensemble may not be one cell type. If Xenium shows it is heterogeneous, the chemogenetic result becomes harder to interpret — which is a reason to let Experiment 1 report before the powered cohort is locked.</a:t>
+              <a:t>BMAp is small and next to MEA, BLA and the sAMY-like GABA populations. Mitigation: small injection volume, and every mouse verified histologically against the subclass markers from the panel work.</a:t>
             </a:r>
           </a:p>
           <a:p>
@@ -13672,12 +13655,12 @@
               </a:spcAft>
             </a:pPr>
             <a:r>
-              <a:rPr sz="1150" b="1">
-                <a:solidFill>
-                  <a:srgbClr val="1F3B63"/>
+              <a:rPr sz="1150" b="0">
+                <a:solidFill>
+                  <a:srgbClr val="595959"/>
                 </a:solidFill>
               </a:rPr>
-              <a:t>Morphine dose and delivery volume are not written down anywhere I can find in the code or manifests. I need them for the methods section and for the licence.</a:t>
+              <a:t>Our Post ensemble may not be one cell type. If Xenium shows it is heterogeneous, the chemogenetic result becomes harder to interpret — which is a reason to let Experiment 1 report before the powered cohort is locked.</a:t>
             </a:r>
           </a:p>
           <a:p>
@@ -13695,7 +13678,7 @@
                   <a:srgbClr val="595959"/>
                 </a:solidFill>
               </a:rPr>
-              <a:t>Oral lick-based self-administration is less standard than IV, so reviewers will ask for intake per session in mg/kg. Worth agreeing how we report that now.</a:t>
+              <a:t>Morphine dose is now specified (next slide). The one number still missing is the Micro4 flow rate: the rig pulses the pump for 0.3 s per reward, so volume per reward = rate × 0.3 s. One calibration measurement closes the methods section.</a:t>
             </a:r>
           </a:p>
         </p:txBody>
@@ -13754,7 +13737,7 @@
                   <a:srgbClr val="2E6DA4"/>
                 </a:solidFill>
               </a:rPr>
-              <a:t>REFERENCES</a:t>
+              <a:t>LOCKED</a:t>
             </a:r>
           </a:p>
         </p:txBody>
@@ -13795,14 +13778,55 @@
                   <a:srgbClr val="1F3B63"/>
                 </a:solidFill>
               </a:rPr>
-              <a:t>References for every parameter used in this deck</a:t>
-            </a:r>
-          </a:p>
-        </p:txBody>
-      </p:sp>
-      <p:sp>
-        <p:nvSpPr>
-          <p:cNvPr id="4" name="Rectangle 3"/>
+              <a:t>Parameters now locked</a:t>
+            </a:r>
+          </a:p>
+        </p:txBody>
+      </p:sp>
+      <p:sp>
+        <p:nvSpPr>
+          <p:cNvPr id="4" name="TextBox 3"/>
+          <p:cNvSpPr txBox="1"/>
+          <p:nvPr/>
+        </p:nvSpPr>
+        <p:spPr>
+          <a:xfrm>
+            <a:off x="502920" y="941832"/>
+            <a:ext cx="11185855" cy="329184"/>
+          </a:xfrm>
+          <a:prstGeom prst="rect">
+            <a:avLst/>
+          </a:prstGeom>
+          <a:noFill/>
+        </p:spPr>
+        <p:txBody>
+          <a:bodyPr wrap="square">
+            <a:spAutoFit/>
+          </a:bodyPr>
+          <a:lstStyle/>
+          <a:p>
+            <a:pPr>
+              <a:lnSpc>
+                <a:spcPct val="95000"/>
+              </a:lnSpc>
+              <a:spcAft>
+                <a:spcPts val="400"/>
+              </a:spcAft>
+            </a:pPr>
+            <a:r>
+              <a:rPr sz="1300" b="0">
+                <a:solidFill>
+                  <a:srgbClr val="595959"/>
+                </a:solidFill>
+              </a:rPr>
+              <a:t>Nothing on this slide is still open, so the October panel order and the November surgery can both proceed</a:t>
+            </a:r>
+          </a:p>
+        </p:txBody>
+      </p:sp>
+      <p:sp>
+        <p:nvSpPr>
+          <p:cNvPr id="5" name="Rectangle 4"/>
           <p:cNvSpPr/>
           <p:nvPr/>
         </p:nvSpPr>
@@ -13846,6 +13870,1107 @@
       </p:sp>
       <p:graphicFrame>
         <p:nvGraphicFramePr>
+          <p:cNvPr id="6" name="Table 5"/>
+          <p:cNvGraphicFramePr>
+            <a:graphicFrameLocks noGrp="1"/>
+          </p:cNvGraphicFramePr>
+          <p:nvPr/>
+        </p:nvGraphicFramePr>
+        <p:xfrm>
+          <a:off x="502920" y="1298448"/>
+          <a:ext cx="11185854" cy="3941064"/>
+        </p:xfrm>
+        <a:graphic>
+          <a:graphicData uri="http://schemas.openxmlformats.org/drawingml/2006/table">
+            <a:tbl>
+              <a:tblPr firstRow="1" bandRow="1">
+                <a:tableStyleId>{5C22544A-7EE6-4342-B048-85BDC9FD1C3A}</a:tableStyleId>
+              </a:tblPr>
+              <a:tblGrid>
+                <a:gridCol w="1696215"/>
+                <a:gridCol w="3988399"/>
+                <a:gridCol w="5501240"/>
+              </a:tblGrid>
+              <a:tr h="237744">
+                <a:tc>
+                  <a:txBody>
+                    <a:bodyPr/>
+                    <a:lstStyle/>
+                    <a:p>
+                      <a:pPr algn="l">
+                        <a:lnSpc>
+                          <a:spcPct val="92000"/>
+                        </a:lnSpc>
+                      </a:pPr>
+                    </a:p>
+                  </a:txBody>
+                  <a:tcPr anchor="ctr" marL="54864" marR="54864" marT="18288" marB="18288">
+                    <a:solidFill>
+                      <a:srgbClr val="1F3B63"/>
+                    </a:solidFill>
+                  </a:tcPr>
+                </a:tc>
+                <a:tc>
+                  <a:txBody>
+                    <a:bodyPr/>
+                    <a:lstStyle/>
+                    <a:p>
+                      <a:pPr algn="l">
+                        <a:lnSpc>
+                          <a:spcPct val="92000"/>
+                        </a:lnSpc>
+                      </a:pPr>
+                      <a:r>
+                        <a:rPr sz="1050" b="1">
+                          <a:solidFill>
+                            <a:srgbClr val="FFFFFF"/>
+                          </a:solidFill>
+                        </a:rPr>
+                        <a:t>Value</a:t>
+                      </a:r>
+                    </a:p>
+                  </a:txBody>
+                  <a:tcPr anchor="ctr" marL="54864" marR="54864" marT="18288" marB="18288">
+                    <a:solidFill>
+                      <a:srgbClr val="1F3B63"/>
+                    </a:solidFill>
+                  </a:tcPr>
+                </a:tc>
+                <a:tc>
+                  <a:txBody>
+                    <a:bodyPr/>
+                    <a:lstStyle/>
+                    <a:p>
+                      <a:pPr algn="l">
+                        <a:lnSpc>
+                          <a:spcPct val="92000"/>
+                        </a:lnSpc>
+                      </a:pPr>
+                      <a:r>
+                        <a:rPr sz="1050" b="1">
+                          <a:solidFill>
+                            <a:srgbClr val="FFFFFF"/>
+                          </a:solidFill>
+                        </a:rPr>
+                        <a:t>Note</a:t>
+                      </a:r>
+                    </a:p>
+                  </a:txBody>
+                  <a:tcPr anchor="ctr" marL="54864" marR="54864" marT="18288" marB="18288">
+                    <a:solidFill>
+                      <a:srgbClr val="1F3B63"/>
+                    </a:solidFill>
+                  </a:tcPr>
+                </a:tc>
+              </a:tr>
+              <a:tr h="411480">
+                <a:tc>
+                  <a:txBody>
+                    <a:bodyPr/>
+                    <a:lstStyle/>
+                    <a:p>
+                      <a:pPr algn="l">
+                        <a:lnSpc>
+                          <a:spcPct val="92000"/>
+                        </a:lnSpc>
+                      </a:pPr>
+                      <a:r>
+                        <a:rPr sz="1000" b="0">
+                          <a:solidFill>
+                            <a:srgbClr val="1F3B63"/>
+                          </a:solidFill>
+                        </a:rPr>
+                        <a:t>Driver × reporter</a:t>
+                      </a:r>
+                    </a:p>
+                  </a:txBody>
+                  <a:tcPr anchor="ctr" marL="54864" marR="54864" marT="18288" marB="18288">
+                    <a:solidFill>
+                      <a:srgbClr val="FFFFFF"/>
+                    </a:solidFill>
+                  </a:tcPr>
+                </a:tc>
+                <a:tc>
+                  <a:txBody>
+                    <a:bodyPr/>
+                    <a:lstStyle/>
+                    <a:p>
+                      <a:pPr algn="l">
+                        <a:lnSpc>
+                          <a:spcPct val="92000"/>
+                        </a:lnSpc>
+                      </a:pPr>
+                      <a:r>
+                        <a:rPr sz="1000" b="0">
+                          <a:solidFill>
+                            <a:srgbClr val="1F3B63"/>
+                          </a:solidFill>
+                        </a:rPr>
+                        <a:t>TRAP2 (Fos2A-iCreER, JAX 030323) × Ai14 (JAX 007914)</a:t>
+                      </a:r>
+                    </a:p>
+                  </a:txBody>
+                  <a:tcPr anchor="ctr" marL="54864" marR="54864" marT="18288" marB="18288">
+                    <a:solidFill>
+                      <a:srgbClr val="FFFFFF"/>
+                    </a:solidFill>
+                  </a:tcPr>
+                </a:tc>
+                <a:tc>
+                  <a:txBody>
+                    <a:bodyPr/>
+                    <a:lstStyle/>
+                    <a:p>
+                      <a:pPr algn="l">
+                        <a:lnSpc>
+                          <a:spcPct val="92000"/>
+                        </a:lnSpc>
+                      </a:pPr>
+                      <a:r>
+                        <a:rPr sz="1000" b="0">
+                          <a:solidFill>
+                            <a:srgbClr val="1F3B63"/>
+                          </a:solidFill>
+                        </a:rPr>
+                        <a:t>tdTomato mRNA is the permanent tag that Xenium reads.</a:t>
+                      </a:r>
+                    </a:p>
+                  </a:txBody>
+                  <a:tcPr anchor="ctr" marL="54864" marR="54864" marT="18288" marB="18288">
+                    <a:solidFill>
+                      <a:srgbClr val="FFFFFF"/>
+                    </a:solidFill>
+                  </a:tcPr>
+                </a:tc>
+              </a:tr>
+              <a:tr h="411480">
+                <a:tc>
+                  <a:txBody>
+                    <a:bodyPr/>
+                    <a:lstStyle/>
+                    <a:p>
+                      <a:pPr algn="l">
+                        <a:lnSpc>
+                          <a:spcPct val="92000"/>
+                        </a:lnSpc>
+                      </a:pPr>
+                      <a:r>
+                        <a:rPr sz="1000" b="0">
+                          <a:solidFill>
+                            <a:srgbClr val="1F3B63"/>
+                          </a:solidFill>
+                        </a:rPr>
+                        <a:t>Tagging</a:t>
+                      </a:r>
+                    </a:p>
+                  </a:txBody>
+                  <a:tcPr anchor="ctr" marL="54864" marR="54864" marT="18288" marB="18288">
+                    <a:solidFill>
+                      <a:srgbClr val="EEF3F9"/>
+                    </a:solidFill>
+                  </a:tcPr>
+                </a:tc>
+                <a:tc>
+                  <a:txBody>
+                    <a:bodyPr/>
+                    <a:lstStyle/>
+                    <a:p>
+                      <a:pPr algn="l">
+                        <a:lnSpc>
+                          <a:spcPct val="92000"/>
+                        </a:lnSpc>
+                      </a:pPr>
+                      <a:r>
+                        <a:rPr sz="1000" b="0">
+                          <a:solidFill>
+                            <a:srgbClr val="1F3B63"/>
+                          </a:solidFill>
+                        </a:rPr>
+                        <a:t>4-OHT 50 mg/kg i.p., single dose, straight after the day-12 session</a:t>
+                      </a:r>
+                    </a:p>
+                  </a:txBody>
+                  <a:tcPr anchor="ctr" marL="54864" marR="54864" marT="18288" marB="18288">
+                    <a:solidFill>
+                      <a:srgbClr val="EEF3F9"/>
+                    </a:solidFill>
+                  </a:tcPr>
+                </a:tc>
+                <a:tc>
+                  <a:txBody>
+                    <a:bodyPr/>
+                    <a:lstStyle/>
+                    <a:p>
+                      <a:pPr algn="l">
+                        <a:lnSpc>
+                          <a:spcPct val="92000"/>
+                        </a:lnSpc>
+                      </a:pPr>
+                      <a:r>
+                        <a:rPr sz="1000" b="0">
+                          <a:solidFill>
+                            <a:srgbClr val="1F3B63"/>
+                          </a:solidFill>
+                        </a:rPr>
+                        <a:t>Labels within a ~6 h window centred on the injection.</a:t>
+                      </a:r>
+                    </a:p>
+                  </a:txBody>
+                  <a:tcPr anchor="ctr" marL="54864" marR="54864" marT="18288" marB="18288">
+                    <a:solidFill>
+                      <a:srgbClr val="EEF3F9"/>
+                    </a:solidFill>
+                  </a:tcPr>
+                </a:tc>
+              </a:tr>
+              <a:tr h="411480">
+                <a:tc>
+                  <a:txBody>
+                    <a:bodyPr/>
+                    <a:lstStyle/>
+                    <a:p>
+                      <a:pPr algn="l">
+                        <a:lnSpc>
+                          <a:spcPct val="92000"/>
+                        </a:lnSpc>
+                      </a:pPr>
+                      <a:r>
+                        <a:rPr sz="1000" b="0">
+                          <a:solidFill>
+                            <a:srgbClr val="1F3B63"/>
+                          </a:solidFill>
+                        </a:rPr>
+                        <a:t>Housing</a:t>
+                      </a:r>
+                    </a:p>
+                  </a:txBody>
+                  <a:tcPr anchor="ctr" marL="54864" marR="54864" marT="18288" marB="18288">
+                    <a:solidFill>
+                      <a:srgbClr val="FFFFFF"/>
+                    </a:solidFill>
+                  </a:tcPr>
+                </a:tc>
+                <a:tc>
+                  <a:txBody>
+                    <a:bodyPr/>
+                    <a:lstStyle/>
+                    <a:p>
+                      <a:pPr algn="l">
+                        <a:lnSpc>
+                          <a:spcPct val="92000"/>
+                        </a:lnSpc>
+                      </a:pPr>
+                      <a:r>
+                        <a:rPr sz="1000" b="0">
+                          <a:solidFill>
+                            <a:srgbClr val="1F3B63"/>
+                          </a:solidFill>
+                        </a:rPr>
+                        <a:t>Single cage from day 10 onward, applied identically to every group</a:t>
+                      </a:r>
+                    </a:p>
+                  </a:txBody>
+                  <a:tcPr anchor="ctr" marL="54864" marR="54864" marT="18288" marB="18288">
+                    <a:solidFill>
+                      <a:srgbClr val="FFFFFF"/>
+                    </a:solidFill>
+                  </a:tcPr>
+                </a:tc>
+                <a:tc>
+                  <a:txBody>
+                    <a:bodyPr/>
+                    <a:lstStyle/>
+                    <a:p>
+                      <a:pPr algn="l">
+                        <a:lnSpc>
+                          <a:spcPct val="92000"/>
+                        </a:lnSpc>
+                      </a:pPr>
+                      <a:r>
+                        <a:rPr sz="1000" b="0">
+                          <a:solidFill>
+                            <a:srgbClr val="1F3B63"/>
+                          </a:solidFill>
+                        </a:rPr>
+                        <a:t>48 h of habituation before tagging. Costs nothing: yoking is software, and the task runs in the rig rather than the home cage.</a:t>
+                      </a:r>
+                    </a:p>
+                  </a:txBody>
+                  <a:tcPr anchor="ctr" marL="54864" marR="54864" marT="18288" marB="18288">
+                    <a:solidFill>
+                      <a:srgbClr val="FFFFFF"/>
+                    </a:solidFill>
+                  </a:tcPr>
+                </a:tc>
+              </a:tr>
+              <a:tr h="411480">
+                <a:tc>
+                  <a:txBody>
+                    <a:bodyPr/>
+                    <a:lstStyle/>
+                    <a:p>
+                      <a:pPr algn="l">
+                        <a:lnSpc>
+                          <a:spcPct val="92000"/>
+                        </a:lnSpc>
+                      </a:pPr>
+                      <a:r>
+                        <a:rPr sz="1000" b="0">
+                          <a:solidFill>
+                            <a:srgbClr val="1F3B63"/>
+                          </a:solidFill>
+                        </a:rPr>
+                        <a:t>Xenium panel</a:t>
+                      </a:r>
+                    </a:p>
+                  </a:txBody>
+                  <a:tcPr anchor="ctr" marL="54864" marR="54864" marT="18288" marB="18288">
+                    <a:solidFill>
+                      <a:srgbClr val="EEF3F9"/>
+                    </a:solidFill>
+                  </a:tcPr>
+                </a:tc>
+                <a:tc>
+                  <a:txBody>
+                    <a:bodyPr/>
+                    <a:lstStyle/>
+                    <a:p>
+                      <a:pPr algn="l">
+                        <a:lnSpc>
+                          <a:spcPct val="92000"/>
+                        </a:lnSpc>
+                      </a:pPr>
+                      <a:r>
+                        <a:rPr sz="1000" b="0">
+                          <a:solidFill>
+                            <a:srgbClr val="1F3B63"/>
+                          </a:solidFill>
+                        </a:rPr>
+                        <a:t>Base Mouse Brain panel (248 genes) + custom add-on</a:t>
+                      </a:r>
+                    </a:p>
+                  </a:txBody>
+                  <a:tcPr anchor="ctr" marL="54864" marR="54864" marT="18288" marB="18288">
+                    <a:solidFill>
+                      <a:srgbClr val="EEF3F9"/>
+                    </a:solidFill>
+                  </a:tcPr>
+                </a:tc>
+                <a:tc>
+                  <a:txBody>
+                    <a:bodyPr/>
+                    <a:lstStyle/>
+                    <a:p>
+                      <a:pPr algn="l">
+                        <a:lnSpc>
+                          <a:spcPct val="92000"/>
+                        </a:lnSpc>
+                      </a:pPr>
+                      <a:r>
+                        <a:rPr sz="1000" b="0">
+                          <a:solidFill>
+                            <a:srgbClr val="1F3B63"/>
+                          </a:solidFill>
+                        </a:rPr>
+                        <a:t>77 priority-1 genes need 51 add-on slots; 49 slots spare for priority-2 backups.</a:t>
+                      </a:r>
+                    </a:p>
+                  </a:txBody>
+                  <a:tcPr anchor="ctr" marL="54864" marR="54864" marT="18288" marB="18288">
+                    <a:solidFill>
+                      <a:srgbClr val="EEF3F9"/>
+                    </a:solidFill>
+                  </a:tcPr>
+                </a:tc>
+              </a:tr>
+              <a:tr h="411480">
+                <a:tc>
+                  <a:txBody>
+                    <a:bodyPr/>
+                    <a:lstStyle/>
+                    <a:p>
+                      <a:pPr algn="l">
+                        <a:lnSpc>
+                          <a:spcPct val="92000"/>
+                        </a:lnSpc>
+                      </a:pPr>
+                      <a:r>
+                        <a:rPr sz="1000" b="0">
+                          <a:solidFill>
+                            <a:srgbClr val="1F3B63"/>
+                          </a:solidFill>
+                        </a:rPr>
+                        <a:t>Custom probes</a:t>
+                      </a:r>
+                    </a:p>
+                  </a:txBody>
+                  <a:tcPr anchor="ctr" marL="54864" marR="54864" marT="18288" marB="18288">
+                    <a:solidFill>
+                      <a:srgbClr val="FFFFFF"/>
+                    </a:solidFill>
+                  </a:tcPr>
+                </a:tc>
+                <a:tc>
+                  <a:txBody>
+                    <a:bodyPr/>
+                    <a:lstStyle/>
+                    <a:p>
+                      <a:pPr algn="l">
+                        <a:lnSpc>
+                          <a:spcPct val="92000"/>
+                        </a:lnSpc>
+                      </a:pPr>
+                      <a:r>
+                        <a:rPr sz="1000" b="0">
+                          <a:solidFill>
+                            <a:srgbClr val="1F3B63"/>
+                          </a:solidFill>
+                        </a:rPr>
+                        <a:t>tdTomato, iCre</a:t>
+                      </a:r>
+                    </a:p>
+                  </a:txBody>
+                  <a:tcPr anchor="ctr" marL="54864" marR="54864" marT="18288" marB="18288">
+                    <a:solidFill>
+                      <a:srgbClr val="FFFFFF"/>
+                    </a:solidFill>
+                  </a:tcPr>
+                </a:tc>
+                <a:tc>
+                  <a:txBody>
+                    <a:bodyPr/>
+                    <a:lstStyle/>
+                    <a:p>
+                      <a:pPr algn="l">
+                        <a:lnSpc>
+                          <a:spcPct val="92000"/>
+                        </a:lnSpc>
+                      </a:pPr>
+                      <a:r>
+                        <a:rPr sz="1000" b="0">
+                          <a:solidFill>
+                            <a:srgbClr val="1F3B63"/>
+                          </a:solidFill>
+                        </a:rPr>
+                        <a:t>The only two non-mouse targets, and the only long-lead item.</a:t>
+                      </a:r>
+                    </a:p>
+                  </a:txBody>
+                  <a:tcPr anchor="ctr" marL="54864" marR="54864" marT="18288" marB="18288">
+                    <a:solidFill>
+                      <a:srgbClr val="FFFFFF"/>
+                    </a:solidFill>
+                  </a:tcPr>
+                </a:tc>
+              </a:tr>
+              <a:tr h="411480">
+                <a:tc>
+                  <a:txBody>
+                    <a:bodyPr/>
+                    <a:lstStyle/>
+                    <a:p>
+                      <a:pPr algn="l">
+                        <a:lnSpc>
+                          <a:spcPct val="92000"/>
+                        </a:lnSpc>
+                      </a:pPr>
+                      <a:r>
+                        <a:rPr sz="1000" b="0">
+                          <a:solidFill>
+                            <a:srgbClr val="1F3B63"/>
+                          </a:solidFill>
+                        </a:rPr>
+                        <a:t>Xenium group size</a:t>
+                      </a:r>
+                    </a:p>
+                  </a:txBody>
+                  <a:tcPr anchor="ctr" marL="54864" marR="54864" marT="18288" marB="18288">
+                    <a:solidFill>
+                      <a:srgbClr val="EEF3F9"/>
+                    </a:solidFill>
+                  </a:tcPr>
+                </a:tc>
+                <a:tc>
+                  <a:txBody>
+                    <a:bodyPr/>
+                    <a:lstStyle/>
+                    <a:p>
+                      <a:pPr algn="l">
+                        <a:lnSpc>
+                          <a:spcPct val="92000"/>
+                        </a:lnSpc>
+                      </a:pPr>
+                      <a:r>
+                        <a:rPr sz="1000" b="0">
+                          <a:solidFill>
+                            <a:srgbClr val="1F3B63"/>
+                          </a:solidFill>
+                        </a:rPr>
+                        <a:t>4 Active + 4 Passive per region, plus 2 tagging controls</a:t>
+                      </a:r>
+                    </a:p>
+                  </a:txBody>
+                  <a:tcPr anchor="ctr" marL="54864" marR="54864" marT="18288" marB="18288">
+                    <a:solidFill>
+                      <a:srgbClr val="EEF3F9"/>
+                    </a:solidFill>
+                  </a:tcPr>
+                </a:tc>
+                <a:tc>
+                  <a:txBody>
+                    <a:bodyPr/>
+                    <a:lstStyle/>
+                    <a:p>
+                      <a:pPr algn="l">
+                        <a:lnSpc>
+                          <a:spcPct val="92000"/>
+                        </a:lnSpc>
+                      </a:pPr>
+                      <a:r>
+                        <a:rPr sz="1000" b="0">
+                          <a:solidFill>
+                            <a:srgbClr val="1F3B63"/>
+                          </a:solidFill>
+                        </a:rPr>
+                        <a:t>Primary analyses are within-animal, so this n is doing more work than it looks.</a:t>
+                      </a:r>
+                    </a:p>
+                  </a:txBody>
+                  <a:tcPr anchor="ctr" marL="54864" marR="54864" marT="18288" marB="18288">
+                    <a:solidFill>
+                      <a:srgbClr val="EEF3F9"/>
+                    </a:solidFill>
+                  </a:tcPr>
+                </a:tc>
+              </a:tr>
+              <a:tr h="411480">
+                <a:tc>
+                  <a:txBody>
+                    <a:bodyPr/>
+                    <a:lstStyle/>
+                    <a:p>
+                      <a:pPr algn="l">
+                        <a:lnSpc>
+                          <a:spcPct val="92000"/>
+                        </a:lnSpc>
+                      </a:pPr>
+                      <a:r>
+                        <a:rPr sz="1000" b="0">
+                          <a:solidFill>
+                            <a:srgbClr val="1F3B63"/>
+                          </a:solidFill>
+                        </a:rPr>
+                        <a:t>Chemogenetic ligand</a:t>
+                      </a:r>
+                    </a:p>
+                  </a:txBody>
+                  <a:tcPr anchor="ctr" marL="54864" marR="54864" marT="18288" marB="18288">
+                    <a:solidFill>
+                      <a:srgbClr val="FFFFFF"/>
+                    </a:solidFill>
+                  </a:tcPr>
+                </a:tc>
+                <a:tc>
+                  <a:txBody>
+                    <a:bodyPr/>
+                    <a:lstStyle/>
+                    <a:p>
+                      <a:pPr algn="l">
+                        <a:lnSpc>
+                          <a:spcPct val="92000"/>
+                        </a:lnSpc>
+                      </a:pPr>
+                      <a:r>
+                        <a:rPr sz="1000" b="0">
+                          <a:solidFill>
+                            <a:srgbClr val="1F3B63"/>
+                          </a:solidFill>
+                        </a:rPr>
+                        <a:t>DCZ, 0.1 mg/kg i.p.</a:t>
+                      </a:r>
+                    </a:p>
+                  </a:txBody>
+                  <a:tcPr anchor="ctr" marL="54864" marR="54864" marT="18288" marB="18288">
+                    <a:solidFill>
+                      <a:srgbClr val="FFFFFF"/>
+                    </a:solidFill>
+                  </a:tcPr>
+                </a:tc>
+                <a:tc>
+                  <a:txBody>
+                    <a:bodyPr/>
+                    <a:lstStyle/>
+                    <a:p>
+                      <a:pPr algn="l">
+                        <a:lnSpc>
+                          <a:spcPct val="92000"/>
+                        </a:lnSpc>
+                      </a:pPr>
+                      <a:r>
+                        <a:rPr sz="1000" b="0">
+                          <a:solidFill>
+                            <a:srgbClr val="1F3B63"/>
+                          </a:solidFill>
+                        </a:rPr>
+                        <a:t>Chosen over CNO, which back-converts to clozapine — see slide 12.</a:t>
+                      </a:r>
+                    </a:p>
+                  </a:txBody>
+                  <a:tcPr anchor="ctr" marL="54864" marR="54864" marT="18288" marB="18288">
+                    <a:solidFill>
+                      <a:srgbClr val="FFFFFF"/>
+                    </a:solidFill>
+                  </a:tcPr>
+                </a:tc>
+              </a:tr>
+              <a:tr h="411480">
+                <a:tc>
+                  <a:txBody>
+                    <a:bodyPr/>
+                    <a:lstStyle/>
+                    <a:p>
+                      <a:pPr algn="l">
+                        <a:lnSpc>
+                          <a:spcPct val="92000"/>
+                        </a:lnSpc>
+                      </a:pPr>
+                      <a:r>
+                        <a:rPr sz="1000" b="0">
+                          <a:solidFill>
+                            <a:srgbClr val="1F3B63"/>
+                          </a:solidFill>
+                        </a:rPr>
+                        <a:t>Morphine, target</a:t>
+                      </a:r>
+                    </a:p>
+                  </a:txBody>
+                  <a:tcPr anchor="ctr" marL="54864" marR="54864" marT="18288" marB="18288">
+                    <a:solidFill>
+                      <a:srgbClr val="EEF3F9"/>
+                    </a:solidFill>
+                  </a:tcPr>
+                </a:tc>
+                <a:tc>
+                  <a:txBody>
+                    <a:bodyPr/>
+                    <a:lstStyle/>
+                    <a:p>
+                      <a:pPr algn="l">
+                        <a:lnSpc>
+                          <a:spcPct val="92000"/>
+                        </a:lnSpc>
+                      </a:pPr>
+                      <a:r>
+                        <a:rPr sz="1000" b="0">
+                          <a:solidFill>
+                            <a:srgbClr val="1F3B63"/>
+                          </a:solidFill>
+                        </a:rPr>
+                        <a:t>15 mg/kg/day, self-titrated by licking</a:t>
+                      </a:r>
+                    </a:p>
+                  </a:txBody>
+                  <a:tcPr anchor="ctr" marL="54864" marR="54864" marT="18288" marB="18288">
+                    <a:solidFill>
+                      <a:srgbClr val="EEF3F9"/>
+                    </a:solidFill>
+                  </a:tcPr>
+                </a:tc>
+                <a:tc>
+                  <a:txBody>
+                    <a:bodyPr/>
+                    <a:lstStyle/>
+                    <a:p>
+                      <a:pPr algn="l">
+                        <a:lnSpc>
+                          <a:spcPct val="92000"/>
+                        </a:lnSpc>
+                      </a:pPr>
+                      <a:r>
+                        <a:rPr sz="1000" b="0">
+                          <a:solidFill>
+                            <a:srgbClr val="1F3B63"/>
+                          </a:solidFill>
+                        </a:rPr>
+                        <a:t>Dose is set by how many rewards the animal earns, not by the experimenter.</a:t>
+                      </a:r>
+                    </a:p>
+                  </a:txBody>
+                  <a:tcPr anchor="ctr" marL="54864" marR="54864" marT="18288" marB="18288">
+                    <a:solidFill>
+                      <a:srgbClr val="EEF3F9"/>
+                    </a:solidFill>
+                  </a:tcPr>
+                </a:tc>
+              </a:tr>
+              <a:tr h="411480">
+                <a:tc>
+                  <a:txBody>
+                    <a:bodyPr/>
+                    <a:lstStyle/>
+                    <a:p>
+                      <a:pPr algn="l">
+                        <a:lnSpc>
+                          <a:spcPct val="92000"/>
+                        </a:lnSpc>
+                      </a:pPr>
+                      <a:r>
+                        <a:rPr sz="1000" b="0">
+                          <a:solidFill>
+                            <a:srgbClr val="1F3B63"/>
+                          </a:solidFill>
+                        </a:rPr>
+                        <a:t>Morphine, measured</a:t>
+                      </a:r>
+                    </a:p>
+                  </a:txBody>
+                  <a:tcPr anchor="ctr" marL="54864" marR="54864" marT="18288" marB="18288">
+                    <a:solidFill>
+                      <a:srgbClr val="FFFFFF"/>
+                    </a:solidFill>
+                  </a:tcPr>
+                </a:tc>
+                <a:tc>
+                  <a:txBody>
+                    <a:bodyPr/>
+                    <a:lstStyle/>
+                    <a:p>
+                      <a:pPr algn="l">
+                        <a:lnSpc>
+                          <a:spcPct val="92000"/>
+                        </a:lnSpc>
+                      </a:pPr>
+                      <a:r>
+                        <a:rPr sz="1000" b="0">
+                          <a:solidFill>
+                            <a:srgbClr val="1F3B63"/>
+                          </a:solidFill>
+                        </a:rPr>
+                        <a:t>~16 mg/kg at 30 rewards (PR 30)  →  ~0.53 mg/kg per reward</a:t>
+                      </a:r>
+                    </a:p>
+                  </a:txBody>
+                  <a:tcPr anchor="ctr" marL="54864" marR="54864" marT="18288" marB="18288">
+                    <a:solidFill>
+                      <a:srgbClr val="FFFFFF"/>
+                    </a:solidFill>
+                  </a:tcPr>
+                </a:tc>
+                <a:tc>
+                  <a:txBody>
+                    <a:bodyPr/>
+                    <a:lstStyle/>
+                    <a:p>
+                      <a:pPr algn="l">
+                        <a:lnSpc>
+                          <a:spcPct val="92000"/>
+                        </a:lnSpc>
+                      </a:pPr>
+                      <a:r>
+                        <a:rPr sz="1000" b="0">
+                          <a:solidFill>
+                            <a:srgbClr val="1F3B63"/>
+                          </a:solidFill>
+                        </a:rPr>
+                        <a:t>~13 µg per reward in a 25 g mouse. Volume per reward follows from the Micro4 flow rate × the 0.3 s pulse the rig sends.</a:t>
+                      </a:r>
+                    </a:p>
+                  </a:txBody>
+                  <a:tcPr anchor="ctr" marL="54864" marR="54864" marT="18288" marB="18288">
+                    <a:solidFill>
+                      <a:srgbClr val="FFFFFF"/>
+                    </a:solidFill>
+                  </a:tcPr>
+                </a:tc>
+              </a:tr>
+            </a:tbl>
+          </a:graphicData>
+        </a:graphic>
+      </p:graphicFrame>
+      <p:sp>
+        <p:nvSpPr>
+          <p:cNvPr id="7" name="Rectangle 6"/>
+          <p:cNvSpPr/>
+          <p:nvPr/>
+        </p:nvSpPr>
+        <p:spPr>
+          <a:xfrm>
+            <a:off x="502920" y="5532120"/>
+            <a:ext cx="11185855" cy="292608"/>
+          </a:xfrm>
+          <a:prstGeom prst="rect">
+            <a:avLst/>
+          </a:prstGeom>
+          <a:solidFill>
+            <a:srgbClr val="2E6DA4"/>
+          </a:solidFill>
+          <a:ln>
+            <a:noFill/>
+          </a:ln>
+          <a:effectLst/>
+        </p:spPr>
+        <p:style>
+          <a:lnRef idx="1">
+            <a:schemeClr val="accent1"/>
+          </a:lnRef>
+          <a:fillRef idx="3">
+            <a:schemeClr val="accent1"/>
+          </a:fillRef>
+          <a:effectRef idx="2">
+            <a:schemeClr val="accent1"/>
+          </a:effectRef>
+          <a:fontRef idx="minor">
+            <a:schemeClr val="lt1"/>
+          </a:fontRef>
+        </p:style>
+        <p:txBody>
+          <a:bodyPr rtlCol="0" anchor="ctr" tIns="18288" bIns="18288" wrap="square"/>
+          <a:lstStyle/>
+          <a:p>
+            <a:pPr>
+              <a:lnSpc>
+                <a:spcPct val="95000"/>
+              </a:lnSpc>
+              <a:spcAft>
+                <a:spcPts val="400"/>
+              </a:spcAft>
+            </a:pPr>
+            <a:r>
+              <a:rPr sz="1150" b="1">
+                <a:solidFill>
+                  <a:srgbClr val="FFFFFF"/>
+                </a:solidFill>
+              </a:rPr>
+              <a:t>WHY A SELF-TITRATED DOSE IS AN ADVANTAGE HERE, NOT A WEAKNESS</a:t>
+            </a:r>
+          </a:p>
+        </p:txBody>
+      </p:sp>
+      <p:sp>
+        <p:nvSpPr>
+          <p:cNvPr id="8" name="Rectangle 7"/>
+          <p:cNvSpPr/>
+          <p:nvPr/>
+        </p:nvSpPr>
+        <p:spPr>
+          <a:xfrm>
+            <a:off x="502920" y="5824728"/>
+            <a:ext cx="11185855" cy="850392"/>
+          </a:xfrm>
+          <a:prstGeom prst="rect">
+            <a:avLst/>
+          </a:prstGeom>
+          <a:solidFill>
+            <a:srgbClr val="EEF3F9"/>
+          </a:solidFill>
+          <a:ln>
+            <a:solidFill>
+              <a:srgbClr val="D9E4F0"/>
+            </a:solidFill>
+          </a:ln>
+          <a:effectLst/>
+        </p:spPr>
+        <p:style>
+          <a:lnRef idx="1">
+            <a:schemeClr val="accent1"/>
+          </a:lnRef>
+          <a:fillRef idx="3">
+            <a:schemeClr val="accent1"/>
+          </a:fillRef>
+          <a:effectRef idx="2">
+            <a:schemeClr val="accent1"/>
+          </a:effectRef>
+          <a:fontRef idx="minor">
+            <a:schemeClr val="lt1"/>
+          </a:fontRef>
+        </p:style>
+        <p:txBody>
+          <a:bodyPr rtlCol="0" anchor="t" wrap="square" lIns="109728" rIns="109728" tIns="82296"/>
+          <a:lstStyle/>
+          <a:p>
+            <a:pPr algn="l">
+              <a:lnSpc>
+                <a:spcPct val="97000"/>
+              </a:lnSpc>
+              <a:spcAft>
+                <a:spcPts val="500"/>
+              </a:spcAft>
+            </a:pPr>
+            <a:r>
+              <a:rPr sz="1100" b="1">
+                <a:solidFill>
+                  <a:srgbClr val="1F3B63"/>
+                </a:solidFill>
+              </a:rPr>
+              <a:t>Active and Passive intake are matched by construction rather than by assumption: the Passive session replays the Active partner's reward log, so reward count and timing are identical. That is precisely what makes the Active-versus-Passive contrast a test of volition rather than a test of drug exposure.</a:t>
+            </a:r>
+          </a:p>
+          <a:p>
+            <a:pPr algn="l">
+              <a:lnSpc>
+                <a:spcPct val="97000"/>
+              </a:lnSpc>
+              <a:spcAft>
+                <a:spcPts val="500"/>
+              </a:spcAft>
+            </a:pPr>
+            <a:r>
+              <a:rPr sz="1100" b="0">
+                <a:solidFill>
+                  <a:srgbClr val="595959"/>
+                </a:solidFill>
+              </a:rPr>
+              <a:t>I will still report mg/kg per mouse per session and carry it as a covariate, because reviewers of oral self-administration always ask for it.</a:t>
+            </a:r>
+          </a:p>
+        </p:txBody>
+      </p:sp>
+    </p:spTree>
+  </p:cSld>
+  <p:clrMapOvr>
+    <a:masterClrMapping/>
+  </p:clrMapOvr>
+</p:sld>
+</file>
+
+<file path=ppt/slides/slide17.xml><?xml version="1.0" encoding="utf-8"?>
+<p:sld xmlns:a="http://schemas.openxmlformats.org/drawingml/2006/main" xmlns:p="http://schemas.openxmlformats.org/presentationml/2006/main" xmlns:r="http://schemas.openxmlformats.org/officeDocument/2006/relationships">
+  <p:cSld>
+    <p:spTree>
+      <p:nvGrpSpPr>
+        <p:cNvPr id="1" name=""/>
+        <p:cNvGrpSpPr/>
+        <p:nvPr/>
+      </p:nvGrpSpPr>
+      <p:grpSpPr/>
+      <p:sp>
+        <p:nvSpPr>
+          <p:cNvPr id="2" name="TextBox 1"/>
+          <p:cNvSpPr txBox="1"/>
+          <p:nvPr/>
+        </p:nvSpPr>
+        <p:spPr>
+          <a:xfrm>
+            <a:off x="502920" y="201168"/>
+            <a:ext cx="11185855" cy="256032"/>
+          </a:xfrm>
+          <a:prstGeom prst="rect">
+            <a:avLst/>
+          </a:prstGeom>
+          <a:noFill/>
+        </p:spPr>
+        <p:txBody>
+          <a:bodyPr wrap="square">
+            <a:spAutoFit/>
+          </a:bodyPr>
+          <a:lstStyle/>
+          <a:p>
+            <a:pPr>
+              <a:lnSpc>
+                <a:spcPct val="95000"/>
+              </a:lnSpc>
+              <a:spcAft>
+                <a:spcPts val="400"/>
+              </a:spcAft>
+            </a:pPr>
+            <a:r>
+              <a:rPr sz="1100" b="1">
+                <a:solidFill>
+                  <a:srgbClr val="2E6DA4"/>
+                </a:solidFill>
+              </a:rPr>
+              <a:t>REFERENCES</a:t>
+            </a:r>
+          </a:p>
+        </p:txBody>
+      </p:sp>
+      <p:sp>
+        <p:nvSpPr>
+          <p:cNvPr id="3" name="TextBox 2"/>
+          <p:cNvSpPr txBox="1"/>
+          <p:nvPr/>
+        </p:nvSpPr>
+        <p:spPr>
+          <a:xfrm>
+            <a:off x="502920" y="457200"/>
+            <a:ext cx="11185855" cy="502920"/>
+          </a:xfrm>
+          <a:prstGeom prst="rect">
+            <a:avLst/>
+          </a:prstGeom>
+          <a:noFill/>
+        </p:spPr>
+        <p:txBody>
+          <a:bodyPr wrap="square">
+            <a:spAutoFit/>
+          </a:bodyPr>
+          <a:lstStyle/>
+          <a:p>
+            <a:pPr>
+              <a:lnSpc>
+                <a:spcPct val="95000"/>
+              </a:lnSpc>
+              <a:spcAft>
+                <a:spcPts val="400"/>
+              </a:spcAft>
+            </a:pPr>
+            <a:r>
+              <a:rPr sz="2500" b="1">
+                <a:solidFill>
+                  <a:srgbClr val="1F3B63"/>
+                </a:solidFill>
+              </a:rPr>
+              <a:t>References for every parameter used in this deck</a:t>
+            </a:r>
+          </a:p>
+        </p:txBody>
+      </p:sp>
+      <p:sp>
+        <p:nvSpPr>
+          <p:cNvPr id="4" name="Rectangle 3"/>
+          <p:cNvSpPr/>
+          <p:nvPr/>
+        </p:nvSpPr>
+        <p:spPr>
+          <a:xfrm>
+            <a:off x="502920" y="1234440"/>
+            <a:ext cx="11185855" cy="11430"/>
+          </a:xfrm>
+          <a:prstGeom prst="rect">
+            <a:avLst/>
+          </a:prstGeom>
+          <a:solidFill>
+            <a:srgbClr val="D9E4F0"/>
+          </a:solidFill>
+          <a:ln>
+            <a:noFill/>
+          </a:ln>
+          <a:effectLst/>
+        </p:spPr>
+        <p:style>
+          <a:lnRef idx="1">
+            <a:schemeClr val="accent1"/>
+          </a:lnRef>
+          <a:fillRef idx="3">
+            <a:schemeClr val="accent1"/>
+          </a:fillRef>
+          <a:effectRef idx="2">
+            <a:schemeClr val="accent1"/>
+          </a:effectRef>
+          <a:fontRef idx="minor">
+            <a:schemeClr val="lt1"/>
+          </a:fontRef>
+        </p:style>
+        <p:txBody>
+          <a:bodyPr rtlCol="0" anchor="ctr"/>
+          <a:lstStyle/>
+          <a:p>
+            <a:pPr algn="ctr"/>
+          </a:p>
+        </p:txBody>
+      </p:sp>
+      <p:graphicFrame>
+        <p:nvGraphicFramePr>
           <p:cNvPr id="5" name="Table 4"/>
           <p:cNvGraphicFramePr>
             <a:graphicFrameLocks noGrp="1"/>
@@ -13854,7 +14979,7 @@
         </p:nvGraphicFramePr>
         <p:xfrm>
           <a:off x="502920" y="1298448"/>
-          <a:ext cx="11185854" cy="4809744"/>
+          <a:ext cx="11185854" cy="4828032"/>
         </p:xfrm>
         <a:graphic>
           <a:graphicData uri="http://schemas.openxmlformats.org/drawingml/2006/table">
@@ -13866,7 +14991,7 @@
                 <a:gridCol w="4217617"/>
                 <a:gridCol w="6968237"/>
               </a:tblGrid>
-              <a:tr h="237744">
+              <a:tr h="219456">
                 <a:tc>
                   <a:txBody>
                     <a:bodyPr/>
@@ -13920,19 +15045,19 @@
                   </a:tcPr>
                 </a:tc>
               </a:tr>
-              <a:tr h="457200">
-                <a:tc>
-                  <a:txBody>
-                    <a:bodyPr/>
-                    <a:lstStyle/>
-                    <a:p>
-                      <a:pPr algn="l">
-                        <a:lnSpc>
-                          <a:spcPct val="92000"/>
-                        </a:lnSpc>
-                      </a:pPr>
-                      <a:r>
-                        <a:rPr sz="950" b="0">
+              <a:tr h="384048">
+                <a:tc>
+                  <a:txBody>
+                    <a:bodyPr/>
+                    <a:lstStyle/>
+                    <a:p>
+                      <a:pPr algn="l">
+                        <a:lnSpc>
+                          <a:spcPct val="92000"/>
+                        </a:lnSpc>
+                      </a:pPr>
+                      <a:r>
+                        <a:rPr sz="900" b="0">
                           <a:solidFill>
                             <a:srgbClr val="1F3B63"/>
                           </a:solidFill>
@@ -13958,7 +15083,7 @@
                         </a:lnSpc>
                       </a:pPr>
                       <a:r>
-                        <a:rPr sz="950" b="0">
+                        <a:rPr sz="900" b="0">
                           <a:solidFill>
                             <a:srgbClr val="1F3B63"/>
                           </a:solidFill>
@@ -13974,19 +15099,19 @@
                   </a:tcPr>
                 </a:tc>
               </a:tr>
-              <a:tr h="457200">
-                <a:tc>
-                  <a:txBody>
-                    <a:bodyPr/>
-                    <a:lstStyle/>
-                    <a:p>
-                      <a:pPr algn="l">
-                        <a:lnSpc>
-                          <a:spcPct val="92000"/>
-                        </a:lnSpc>
-                      </a:pPr>
-                      <a:r>
-                        <a:rPr sz="950" b="0">
+              <a:tr h="384048">
+                <a:tc>
+                  <a:txBody>
+                    <a:bodyPr/>
+                    <a:lstStyle/>
+                    <a:p>
+                      <a:pPr algn="l">
+                        <a:lnSpc>
+                          <a:spcPct val="92000"/>
+                        </a:lnSpc>
+                      </a:pPr>
+                      <a:r>
+                        <a:rPr sz="900" b="0">
                           <a:solidFill>
                             <a:srgbClr val="1F3B63"/>
                           </a:solidFill>
@@ -14012,7 +15137,7 @@
                         </a:lnSpc>
                       </a:pPr>
                       <a:r>
-                        <a:rPr sz="950" b="0">
+                        <a:rPr sz="900" b="0">
                           <a:solidFill>
                             <a:srgbClr val="1F3B63"/>
                           </a:solidFill>
@@ -14028,19 +15153,19 @@
                   </a:tcPr>
                 </a:tc>
               </a:tr>
-              <a:tr h="457200">
-                <a:tc>
-                  <a:txBody>
-                    <a:bodyPr/>
-                    <a:lstStyle/>
-                    <a:p>
-                      <a:pPr algn="l">
-                        <a:lnSpc>
-                          <a:spcPct val="92000"/>
-                        </a:lnSpc>
-                      </a:pPr>
-                      <a:r>
-                        <a:rPr sz="950" b="0">
+              <a:tr h="384048">
+                <a:tc>
+                  <a:txBody>
+                    <a:bodyPr/>
+                    <a:lstStyle/>
+                    <a:p>
+                      <a:pPr algn="l">
+                        <a:lnSpc>
+                          <a:spcPct val="92000"/>
+                        </a:lnSpc>
+                      </a:pPr>
+                      <a:r>
+                        <a:rPr sz="900" b="0">
                           <a:solidFill>
                             <a:srgbClr val="1F3B63"/>
                           </a:solidFill>
@@ -14066,7 +15191,7 @@
                         </a:lnSpc>
                       </a:pPr>
                       <a:r>
-                        <a:rPr sz="950" b="0">
+                        <a:rPr sz="900" b="0">
                           <a:solidFill>
                             <a:srgbClr val="1F3B63"/>
                           </a:solidFill>
@@ -14082,19 +15207,19 @@
                   </a:tcPr>
                 </a:tc>
               </a:tr>
-              <a:tr h="457200">
-                <a:tc>
-                  <a:txBody>
-                    <a:bodyPr/>
-                    <a:lstStyle/>
-                    <a:p>
-                      <a:pPr algn="l">
-                        <a:lnSpc>
-                          <a:spcPct val="92000"/>
-                        </a:lnSpc>
-                      </a:pPr>
-                      <a:r>
-                        <a:rPr sz="950" b="0">
+              <a:tr h="384048">
+                <a:tc>
+                  <a:txBody>
+                    <a:bodyPr/>
+                    <a:lstStyle/>
+                    <a:p>
+                      <a:pPr algn="l">
+                        <a:lnSpc>
+                          <a:spcPct val="92000"/>
+                        </a:lnSpc>
+                      </a:pPr>
+                      <a:r>
+                        <a:rPr sz="900" b="0">
                           <a:solidFill>
                             <a:srgbClr val="1F3B63"/>
                           </a:solidFill>
@@ -14120,7 +15245,7 @@
                         </a:lnSpc>
                       </a:pPr>
                       <a:r>
-                        <a:rPr sz="950" b="0">
+                        <a:rPr sz="900" b="0">
                           <a:solidFill>
                             <a:srgbClr val="1F3B63"/>
                           </a:solidFill>
@@ -14136,19 +15261,19 @@
                   </a:tcPr>
                 </a:tc>
               </a:tr>
-              <a:tr h="457200">
-                <a:tc>
-                  <a:txBody>
-                    <a:bodyPr/>
-                    <a:lstStyle/>
-                    <a:p>
-                      <a:pPr algn="l">
-                        <a:lnSpc>
-                          <a:spcPct val="92000"/>
-                        </a:lnSpc>
-                      </a:pPr>
-                      <a:r>
-                        <a:rPr sz="950" b="0">
+              <a:tr h="384048">
+                <a:tc>
+                  <a:txBody>
+                    <a:bodyPr/>
+                    <a:lstStyle/>
+                    <a:p>
+                      <a:pPr algn="l">
+                        <a:lnSpc>
+                          <a:spcPct val="92000"/>
+                        </a:lnSpc>
+                      </a:pPr>
+                      <a:r>
+                        <a:rPr sz="900" b="0">
                           <a:solidFill>
                             <a:srgbClr val="1F3B63"/>
                           </a:solidFill>
@@ -14174,7 +15299,7 @@
                         </a:lnSpc>
                       </a:pPr>
                       <a:r>
-                        <a:rPr sz="950" b="0">
+                        <a:rPr sz="900" b="0">
                           <a:solidFill>
                             <a:srgbClr val="1F3B63"/>
                           </a:solidFill>
@@ -14190,19 +15315,19 @@
                   </a:tcPr>
                 </a:tc>
               </a:tr>
-              <a:tr h="457200">
-                <a:tc>
-                  <a:txBody>
-                    <a:bodyPr/>
-                    <a:lstStyle/>
-                    <a:p>
-                      <a:pPr algn="l">
-                        <a:lnSpc>
-                          <a:spcPct val="92000"/>
-                        </a:lnSpc>
-                      </a:pPr>
-                      <a:r>
-                        <a:rPr sz="950" b="0">
+              <a:tr h="384048">
+                <a:tc>
+                  <a:txBody>
+                    <a:bodyPr/>
+                    <a:lstStyle/>
+                    <a:p>
+                      <a:pPr algn="l">
+                        <a:lnSpc>
+                          <a:spcPct val="92000"/>
+                        </a:lnSpc>
+                      </a:pPr>
+                      <a:r>
+                        <a:rPr sz="900" b="0">
                           <a:solidFill>
                             <a:srgbClr val="1F3B63"/>
                           </a:solidFill>
@@ -14228,7 +15353,7 @@
                         </a:lnSpc>
                       </a:pPr>
                       <a:r>
-                        <a:rPr sz="950" b="0">
+                        <a:rPr sz="900" b="0">
                           <a:solidFill>
                             <a:srgbClr val="1F3B63"/>
                           </a:solidFill>
@@ -14244,19 +15369,19 @@
                   </a:tcPr>
                 </a:tc>
               </a:tr>
-              <a:tr h="457200">
-                <a:tc>
-                  <a:txBody>
-                    <a:bodyPr/>
-                    <a:lstStyle/>
-                    <a:p>
-                      <a:pPr algn="l">
-                        <a:lnSpc>
-                          <a:spcPct val="92000"/>
-                        </a:lnSpc>
-                      </a:pPr>
-                      <a:r>
-                        <a:rPr sz="950" b="0">
+              <a:tr h="384048">
+                <a:tc>
+                  <a:txBody>
+                    <a:bodyPr/>
+                    <a:lstStyle/>
+                    <a:p>
+                      <a:pPr algn="l">
+                        <a:lnSpc>
+                          <a:spcPct val="92000"/>
+                        </a:lnSpc>
+                      </a:pPr>
+                      <a:r>
+                        <a:rPr sz="900" b="0">
                           <a:solidFill>
                             <a:srgbClr val="1F3B63"/>
                           </a:solidFill>
@@ -14282,7 +15407,7 @@
                         </a:lnSpc>
                       </a:pPr>
                       <a:r>
-                        <a:rPr sz="950" b="0">
+                        <a:rPr sz="900" b="0">
                           <a:solidFill>
                             <a:srgbClr val="1F3B63"/>
                           </a:solidFill>
@@ -14298,19 +15423,19 @@
                   </a:tcPr>
                 </a:tc>
               </a:tr>
-              <a:tr h="457200">
-                <a:tc>
-                  <a:txBody>
-                    <a:bodyPr/>
-                    <a:lstStyle/>
-                    <a:p>
-                      <a:pPr algn="l">
-                        <a:lnSpc>
-                          <a:spcPct val="92000"/>
-                        </a:lnSpc>
-                      </a:pPr>
-                      <a:r>
-                        <a:rPr sz="950" b="0">
+              <a:tr h="384048">
+                <a:tc>
+                  <a:txBody>
+                    <a:bodyPr/>
+                    <a:lstStyle/>
+                    <a:p>
+                      <a:pPr algn="l">
+                        <a:lnSpc>
+                          <a:spcPct val="92000"/>
+                        </a:lnSpc>
+                      </a:pPr>
+                      <a:r>
+                        <a:rPr sz="900" b="0">
                           <a:solidFill>
                             <a:srgbClr val="1F3B63"/>
                           </a:solidFill>
@@ -14336,7 +15461,7 @@
                         </a:lnSpc>
                       </a:pPr>
                       <a:r>
-                        <a:rPr sz="950" b="0">
+                        <a:rPr sz="900" b="0">
                           <a:solidFill>
                             <a:srgbClr val="1F3B63"/>
                           </a:solidFill>
@@ -14352,19 +15477,19 @@
                   </a:tcPr>
                 </a:tc>
               </a:tr>
-              <a:tr h="457200">
-                <a:tc>
-                  <a:txBody>
-                    <a:bodyPr/>
-                    <a:lstStyle/>
-                    <a:p>
-                      <a:pPr algn="l">
-                        <a:lnSpc>
-                          <a:spcPct val="92000"/>
-                        </a:lnSpc>
-                      </a:pPr>
-                      <a:r>
-                        <a:rPr sz="950" b="0">
+              <a:tr h="384048">
+                <a:tc>
+                  <a:txBody>
+                    <a:bodyPr/>
+                    <a:lstStyle/>
+                    <a:p>
+                      <a:pPr algn="l">
+                        <a:lnSpc>
+                          <a:spcPct val="92000"/>
+                        </a:lnSpc>
+                      </a:pPr>
+                      <a:r>
+                        <a:rPr sz="900" b="0">
                           <a:solidFill>
                             <a:srgbClr val="1F3B63"/>
                           </a:solidFill>
@@ -14390,7 +15515,7 @@
                         </a:lnSpc>
                       </a:pPr>
                       <a:r>
-                        <a:rPr sz="950" b="0">
+                        <a:rPr sz="900" b="0">
                           <a:solidFill>
                             <a:srgbClr val="1F3B63"/>
                           </a:solidFill>
@@ -14406,19 +15531,19 @@
                   </a:tcPr>
                 </a:tc>
               </a:tr>
-              <a:tr h="457200">
-                <a:tc>
-                  <a:txBody>
-                    <a:bodyPr/>
-                    <a:lstStyle/>
-                    <a:p>
-                      <a:pPr algn="l">
-                        <a:lnSpc>
-                          <a:spcPct val="92000"/>
-                        </a:lnSpc>
-                      </a:pPr>
-                      <a:r>
-                        <a:rPr sz="950" b="0">
+              <a:tr h="384048">
+                <a:tc>
+                  <a:txBody>
+                    <a:bodyPr/>
+                    <a:lstStyle/>
+                    <a:p>
+                      <a:pPr algn="l">
+                        <a:lnSpc>
+                          <a:spcPct val="92000"/>
+                        </a:lnSpc>
+                      </a:pPr>
+                      <a:r>
+                        <a:rPr sz="900" b="0">
                           <a:solidFill>
                             <a:srgbClr val="1F3B63"/>
                           </a:solidFill>
@@ -14444,12 +15569,120 @@
                         </a:lnSpc>
                       </a:pPr>
                       <a:r>
-                        <a:rPr sz="950" b="0">
+                        <a:rPr sz="900" b="0">
                           <a:solidFill>
                             <a:srgbClr val="1F3B63"/>
                           </a:solidFill>
                         </a:rPr>
                         <a:t>10x Genomics CG000683 Xenium Custom Panel Design; CG000643 Designing Custom Xenium Panels</a:t>
+                      </a:r>
+                    </a:p>
+                  </a:txBody>
+                  <a:tcPr anchor="ctr" marL="54864" marR="54864" marT="18288" marB="18288">
+                    <a:solidFill>
+                      <a:srgbClr val="EEF3F9"/>
+                    </a:solidFill>
+                  </a:tcPr>
+                </a:tc>
+              </a:tr>
+              <a:tr h="384048">
+                <a:tc>
+                  <a:txBody>
+                    <a:bodyPr/>
+                    <a:lstStyle/>
+                    <a:p>
+                      <a:pPr algn="l">
+                        <a:lnSpc>
+                          <a:spcPct val="92000"/>
+                        </a:lnSpc>
+                      </a:pPr>
+                      <a:r>
+                        <a:rPr sz="900" b="0">
+                          <a:solidFill>
+                            <a:srgbClr val="1F3B63"/>
+                          </a:solidFill>
+                        </a:rPr>
+                        <a:t>Xenium Mouse Brain v1 base panel = 248 genes (+27 negative controls); 26 of our 77 priority-1 genes are already on it, so the add-on requirement is 51</a:t>
+                      </a:r>
+                    </a:p>
+                  </a:txBody>
+                  <a:tcPr anchor="ctr" marL="54864" marR="54864" marT="18288" marB="18288">
+                    <a:solidFill>
+                      <a:srgbClr val="FFFFFF"/>
+                    </a:solidFill>
+                  </a:tcPr>
+                </a:tc>
+                <a:tc>
+                  <a:txBody>
+                    <a:bodyPr/>
+                    <a:lstStyle/>
+                    <a:p>
+                      <a:pPr algn="l">
+                        <a:lnSpc>
+                          <a:spcPct val="92000"/>
+                        </a:lnSpc>
+                      </a:pPr>
+                      <a:r>
+                        <a:rPr sz="900" b="0">
+                          <a:solidFill>
+                            <a:srgbClr val="1F3B63"/>
+                          </a:solidFill>
+                        </a:rPr>
+                        <a:t>10x gene_panel.json for Xenium_V1_FF_Mouse_Brain_MultiSection_1; matched in v3/E_Planning against the D07 ordering list. Table: outputs/Xenium_addon_vs_base_panel.csv</a:t>
+                      </a:r>
+                    </a:p>
+                  </a:txBody>
+                  <a:tcPr anchor="ctr" marL="54864" marR="54864" marT="18288" marB="18288">
+                    <a:solidFill>
+                      <a:srgbClr val="FFFFFF"/>
+                    </a:solidFill>
+                  </a:tcPr>
+                </a:tc>
+              </a:tr>
+              <a:tr h="384048">
+                <a:tc>
+                  <a:txBody>
+                    <a:bodyPr/>
+                    <a:lstStyle/>
+                    <a:p>
+                      <a:pPr algn="l">
+                        <a:lnSpc>
+                          <a:spcPct val="92000"/>
+                        </a:lnSpc>
+                      </a:pPr>
+                      <a:r>
+                        <a:rPr sz="900" b="0">
+                          <a:solidFill>
+                            <a:srgbClr val="1F3B63"/>
+                          </a:solidFill>
+                        </a:rPr>
+                        <a:t>At n=3 vs 3 the smallest attainable two-tailed rank-sum p is 0.10, so p&lt;0.05 is unreachable; at n=4 vs 4 it is 0.029</a:t>
+                      </a:r>
+                    </a:p>
+                  </a:txBody>
+                  <a:tcPr anchor="ctr" marL="54864" marR="54864" marT="18288" marB="18288">
+                    <a:solidFill>
+                      <a:srgbClr val="EEF3F9"/>
+                    </a:solidFill>
+                  </a:tcPr>
+                </a:tc>
+                <a:tc>
+                  <a:txBody>
+                    <a:bodyPr/>
+                    <a:lstStyle/>
+                    <a:p>
+                      <a:pPr algn="l">
+                        <a:lnSpc>
+                          <a:spcPct val="92000"/>
+                        </a:lnSpc>
+                      </a:pPr>
+                      <a:r>
+                        <a:rPr sz="900" b="0">
+                          <a:solidFill>
+                            <a:srgbClr val="1F3B63"/>
+                          </a:solidFill>
+                        </a:rPr>
+                        <a:t>Exact Mann-Whitney null distribution: 20 and 70 possible orderings respectively. Verified in v3/E_Planning power checks</a:t>
                       </a:r>
                     </a:p>
                   </a:txBody>
@@ -18172,7 +19405,7 @@
         </p:nvGraphicFramePr>
         <p:xfrm>
           <a:off x="502920" y="1298448"/>
-          <a:ext cx="11185854" cy="4151376"/>
+          <a:ext cx="11185854" cy="3959352"/>
         </p:xfrm>
         <a:graphic>
           <a:graphicData uri="http://schemas.openxmlformats.org/drawingml/2006/table">
@@ -18185,7 +19418,7 @@
                 <a:gridCol w="4103686"/>
                 <a:gridCol w="5824587"/>
               </a:tblGrid>
-              <a:tr h="274320">
+              <a:tr h="256032">
                 <a:tc>
                   <a:txBody>
                     <a:bodyPr/>
@@ -18257,19 +19490,19 @@
                   </a:tcPr>
                 </a:tc>
               </a:tr>
-              <a:tr h="484632">
-                <a:tc>
-                  <a:txBody>
-                    <a:bodyPr/>
-                    <a:lstStyle/>
-                    <a:p>
-                      <a:pPr algn="l">
-                        <a:lnSpc>
-                          <a:spcPct val="92000"/>
-                        </a:lnSpc>
-                      </a:pPr>
-                      <a:r>
-                        <a:rPr sz="1050" b="0">
+              <a:tr h="411480">
+                <a:tc>
+                  <a:txBody>
+                    <a:bodyPr/>
+                    <a:lstStyle/>
+                    <a:p>
+                      <a:pPr algn="l">
+                        <a:lnSpc>
+                          <a:spcPct val="92000"/>
+                        </a:lnSpc>
+                      </a:pPr>
+                      <a:r>
+                        <a:rPr sz="1000" b="0">
                           <a:solidFill>
                             <a:srgbClr val="1F3B63"/>
                           </a:solidFill>
@@ -18295,7 +19528,7 @@
                         </a:lnSpc>
                       </a:pPr>
                       <a:r>
-                        <a:rPr sz="1050" b="0">
+                        <a:rPr sz="1000" b="0">
                           <a:solidFill>
                             <a:srgbClr val="1F3B63"/>
                           </a:solidFill>
@@ -18310,7 +19543,7 @@
                         </a:lnSpc>
                       </a:pPr>
                       <a:r>
-                        <a:rPr sz="1050" b="0">
+                        <a:rPr sz="1000" b="0">
                           <a:solidFill>
                             <a:srgbClr val="1F3B63"/>
                           </a:solidFill>
@@ -18336,7 +19569,7 @@
                         </a:lnSpc>
                       </a:pPr>
                       <a:r>
-                        <a:rPr sz="1050" b="0">
+                        <a:rPr sz="1000" b="0">
                           <a:solidFill>
                             <a:srgbClr val="1F3B63"/>
                           </a:solidFill>
@@ -18352,19 +19585,19 @@
                   </a:tcPr>
                 </a:tc>
               </a:tr>
-              <a:tr h="484632">
-                <a:tc>
-                  <a:txBody>
-                    <a:bodyPr/>
-                    <a:lstStyle/>
-                    <a:p>
-                      <a:pPr algn="l">
-                        <a:lnSpc>
-                          <a:spcPct val="92000"/>
-                        </a:lnSpc>
-                      </a:pPr>
-                      <a:r>
-                        <a:rPr sz="1050" b="0">
+              <a:tr h="411480">
+                <a:tc>
+                  <a:txBody>
+                    <a:bodyPr/>
+                    <a:lstStyle/>
+                    <a:p>
+                      <a:pPr algn="l">
+                        <a:lnSpc>
+                          <a:spcPct val="92000"/>
+                        </a:lnSpc>
+                      </a:pPr>
+                      <a:r>
+                        <a:rPr sz="1000" b="0">
                           <a:solidFill>
                             <a:srgbClr val="1F3B63"/>
                           </a:solidFill>
@@ -18390,12 +19623,12 @@
                         </a:lnSpc>
                       </a:pPr>
                       <a:r>
-                        <a:rPr sz="1050" b="0">
-                          <a:solidFill>
-                            <a:srgbClr val="1F3B63"/>
-                          </a:solidFill>
-                        </a:rPr>
-                        <a:t>Active n=3, Passive n=3</a:t>
+                        <a:rPr sz="1000" b="0">
+                          <a:solidFill>
+                            <a:srgbClr val="1F3B63"/>
+                          </a:solidFill>
+                        </a:rPr>
+                        <a:t>Active n=4, Passive n=4</a:t>
                       </a:r>
                     </a:p>
                   </a:txBody>
@@ -18416,12 +19649,12 @@
                         </a:lnSpc>
                       </a:pPr>
                       <a:r>
-                        <a:rPr sz="1050" b="0">
-                          <a:solidFill>
-                            <a:srgbClr val="1F3B63"/>
-                          </a:solidFill>
-                        </a:rPr>
-                        <a:t>Pilot scale. Statistics caveat on the next slide.</a:t>
+                        <a:rPr sz="1000" b="0">
+                          <a:solidFill>
+                            <a:srgbClr val="1F3B63"/>
+                          </a:solidFill>
+                        </a:rPr>
+                        <a:t>At n=3 a rank-sum test cannot reach p&lt;0.05 at all (best possible p = 0.10). n=4 makes p=0.029 attainable. Two mice buy the option of a real test.</a:t>
                       </a:r>
                     </a:p>
                   </a:txBody>
@@ -18432,19 +19665,114 @@
                   </a:tcPr>
                 </a:tc>
               </a:tr>
-              <a:tr h="484632">
-                <a:tc>
-                  <a:txBody>
-                    <a:bodyPr/>
-                    <a:lstStyle/>
-                    <a:p>
-                      <a:pPr algn="l">
-                        <a:lnSpc>
-                          <a:spcPct val="92000"/>
-                        </a:lnSpc>
-                      </a:pPr>
-                      <a:r>
-                        <a:rPr sz="1050" b="0">
+              <a:tr h="411480">
+                <a:tc>
+                  <a:txBody>
+                    <a:bodyPr/>
+                    <a:lstStyle/>
+                    <a:p>
+                      <a:pPr algn="l">
+                        <a:lnSpc>
+                          <a:spcPct val="92000"/>
+                        </a:lnSpc>
+                      </a:pPr>
+                      <a:r>
+                        <a:rPr sz="1000" b="0">
+                          <a:solidFill>
+                            <a:srgbClr val="1F3B63"/>
+                          </a:solidFill>
+                        </a:rPr>
+                        <a:t>Housing</a:t>
+                      </a:r>
+                    </a:p>
+                  </a:txBody>
+                  <a:tcPr anchor="ctr" marL="54864" marR="54864" marT="18288" marB="18288">
+                    <a:solidFill>
+                      <a:srgbClr val="FFFFFF"/>
+                    </a:solidFill>
+                  </a:tcPr>
+                </a:tc>
+                <a:tc>
+                  <a:txBody>
+                    <a:bodyPr/>
+                    <a:lstStyle/>
+                    <a:p>
+                      <a:pPr algn="l">
+                        <a:lnSpc>
+                          <a:spcPct val="92000"/>
+                        </a:lnSpc>
+                      </a:pPr>
+                      <a:r>
+                        <a:rPr sz="1000" b="0">
+                          <a:solidFill>
+                            <a:srgbClr val="1F3B63"/>
+                          </a:solidFill>
+                        </a:rPr>
+                        <a:t>Single-housed from day 10</a:t>
+                      </a:r>
+                    </a:p>
+                    <a:p>
+                      <a:pPr algn="l">
+                        <a:lnSpc>
+                          <a:spcPct val="92000"/>
+                        </a:lnSpc>
+                      </a:pPr>
+                      <a:r>
+                        <a:rPr sz="1000" b="0">
+                          <a:solidFill>
+                            <a:srgbClr val="1F3B63"/>
+                          </a:solidFill>
+                        </a:rPr>
+                        <a:t>(48 h before tagging), all groups alike</a:t>
+                      </a:r>
+                    </a:p>
+                  </a:txBody>
+                  <a:tcPr anchor="ctr" marL="54864" marR="54864" marT="18288" marB="18288">
+                    <a:solidFill>
+                      <a:srgbClr val="FFFFFF"/>
+                    </a:solidFill>
+                  </a:tcPr>
+                </a:tc>
+                <a:tc>
+                  <a:txBody>
+                    <a:bodyPr/>
+                    <a:lstStyle/>
+                    <a:p>
+                      <a:pPr algn="l">
+                        <a:lnSpc>
+                          <a:spcPct val="92000"/>
+                        </a:lnSpc>
+                      </a:pPr>
+                      <a:r>
+                        <a:rPr sz="1000" b="0">
+                          <a:solidFill>
+                            <a:srgbClr val="1F3B63"/>
+                          </a:solidFill>
+                        </a:rPr>
+                        <a:t>BMAp abuts MEA, the social/conspecific nucleus. A cage mate inside the 6-h tagging window would tag social Fos and we would call it morphine.</a:t>
+                      </a:r>
+                    </a:p>
+                  </a:txBody>
+                  <a:tcPr anchor="ctr" marL="54864" marR="54864" marT="18288" marB="18288">
+                    <a:solidFill>
+                      <a:srgbClr val="FFFFFF"/>
+                    </a:solidFill>
+                  </a:tcPr>
+                </a:tc>
+              </a:tr>
+              <a:tr h="411480">
+                <a:tc>
+                  <a:txBody>
+                    <a:bodyPr/>
+                    <a:lstStyle/>
+                    <a:p>
+                      <a:pPr algn="l">
+                        <a:lnSpc>
+                          <a:spcPct val="92000"/>
+                        </a:lnSpc>
+                      </a:pPr>
+                      <a:r>
+                        <a:rPr sz="1000" b="0">
                           <a:solidFill>
                             <a:srgbClr val="1F3B63"/>
                           </a:solidFill>
@@ -18455,6 +19783,101 @@
                   </a:txBody>
                   <a:tcPr anchor="ctr" marL="54864" marR="54864" marT="18288" marB="18288">
                     <a:solidFill>
+                      <a:srgbClr val="EEF3F9"/>
+                    </a:solidFill>
+                  </a:tcPr>
+                </a:tc>
+                <a:tc>
+                  <a:txBody>
+                    <a:bodyPr/>
+                    <a:lstStyle/>
+                    <a:p>
+                      <a:pPr algn="l">
+                        <a:lnSpc>
+                          <a:spcPct val="92000"/>
+                        </a:lnSpc>
+                      </a:pPr>
+                      <a:r>
+                        <a:rPr sz="1000" b="0">
+                          <a:solidFill>
+                            <a:srgbClr val="1F3B63"/>
+                          </a:solidFill>
+                        </a:rPr>
+                        <a:t>4-OHT 50 mg/kg i.p. immediately after the</a:t>
+                      </a:r>
+                    </a:p>
+                    <a:p>
+                      <a:pPr algn="l">
+                        <a:lnSpc>
+                          <a:spcPct val="92000"/>
+                        </a:lnSpc>
+                      </a:pPr>
+                      <a:r>
+                        <a:rPr sz="1000" b="0">
+                          <a:solidFill>
+                            <a:srgbClr val="1F3B63"/>
+                          </a:solidFill>
+                        </a:rPr>
+                        <a:t>behaviour day 12 session (Post day 2)</a:t>
+                      </a:r>
+                    </a:p>
+                  </a:txBody>
+                  <a:tcPr anchor="ctr" marL="54864" marR="54864" marT="18288" marB="18288">
+                    <a:solidFill>
+                      <a:srgbClr val="EEF3F9"/>
+                    </a:solidFill>
+                  </a:tcPr>
+                </a:tc>
+                <a:tc>
+                  <a:txBody>
+                    <a:bodyPr/>
+                    <a:lstStyle/>
+                    <a:p>
+                      <a:pPr algn="l">
+                        <a:lnSpc>
+                          <a:spcPct val="92000"/>
+                        </a:lnSpc>
+                      </a:pPr>
+                      <a:r>
+                        <a:rPr sz="1000" b="0">
+                          <a:solidFill>
+                            <a:srgbClr val="1F3B63"/>
+                          </a:solidFill>
+                        </a:rPr>
+                        <a:t>TRAP2 labels within ~6 h centred on the injection, so this captures the Post state.</a:t>
+                      </a:r>
+                    </a:p>
+                  </a:txBody>
+                  <a:tcPr anchor="ctr" marL="54864" marR="54864" marT="18288" marB="18288">
+                    <a:solidFill>
+                      <a:srgbClr val="EEF3F9"/>
+                    </a:solidFill>
+                  </a:tcPr>
+                </a:tc>
+              </a:tr>
+              <a:tr h="411480">
+                <a:tc>
+                  <a:txBody>
+                    <a:bodyPr/>
+                    <a:lstStyle/>
+                    <a:p>
+                      <a:pPr algn="l">
+                        <a:lnSpc>
+                          <a:spcPct val="92000"/>
+                        </a:lnSpc>
+                      </a:pPr>
+                      <a:r>
+                        <a:rPr sz="1000" b="0">
+                          <a:solidFill>
+                            <a:srgbClr val="1F3B63"/>
+                          </a:solidFill>
+                        </a:rPr>
+                        <a:t>Behaviour</a:t>
+                      </a:r>
+                    </a:p>
+                  </a:txBody>
+                  <a:tcPr anchor="ctr" marL="54864" marR="54864" marT="18288" marB="18288">
+                    <a:solidFill>
                       <a:srgbClr val="FFFFFF"/>
                     </a:solidFill>
                   </a:tcPr>
@@ -18470,27 +19893,27 @@
                         </a:lnSpc>
                       </a:pPr>
                       <a:r>
-                        <a:rPr sz="1050" b="0">
-                          <a:solidFill>
-                            <a:srgbClr val="1F3B63"/>
-                          </a:solidFill>
-                        </a:rPr>
-                        <a:t>4-OHT 50 mg/kg i.p. immediately after the</a:t>
-                      </a:r>
-                    </a:p>
-                    <a:p>
-                      <a:pPr algn="l">
-                        <a:lnSpc>
-                          <a:spcPct val="92000"/>
-                        </a:lnSpc>
-                      </a:pPr>
-                      <a:r>
-                        <a:rPr sz="1050" b="0">
-                          <a:solidFill>
-                            <a:srgbClr val="1F3B63"/>
-                          </a:solidFill>
-                        </a:rPr>
-                        <a:t>behaviour day 12 session (Post day 2)</a:t>
+                        <a:rPr sz="1000" b="0">
+                          <a:solidFill>
+                            <a:srgbClr val="1F3B63"/>
+                          </a:solidFill>
+                        </a:rPr>
+                        <a:t>Unchanged, days 1-18</a:t>
+                      </a:r>
+                    </a:p>
+                    <a:p>
+                      <a:pPr algn="l">
+                        <a:lnSpc>
+                          <a:spcPct val="92000"/>
+                        </a:lnSpc>
+                      </a:pPr>
+                      <a:r>
+                        <a:rPr sz="1000" b="0">
+                          <a:solidFill>
+                            <a:srgbClr val="1F3B63"/>
+                          </a:solidFill>
+                        </a:rPr>
+                        <a:t>(FR, Pre, During, Post, Withdrawal, Re-exposure)</a:t>
                       </a:r>
                     </a:p>
                   </a:txBody>
@@ -18511,12 +19934,12 @@
                         </a:lnSpc>
                       </a:pPr>
                       <a:r>
-                        <a:rPr sz="1050" b="0">
-                          <a:solidFill>
-                            <a:srgbClr val="1F3B63"/>
-                          </a:solidFill>
-                        </a:rPr>
-                        <a:t>TRAP2 labels within ~6 h centred on the injection, so this captures the Post state.</a:t>
+                        <a:rPr sz="1000" b="0">
+                          <a:solidFill>
+                            <a:srgbClr val="1F3B63"/>
+                          </a:solidFill>
+                        </a:rPr>
+                        <a:t>Keeping the paradigm identical means the whole-brain TRAP result still maps onto it.</a:t>
                       </a:r>
                     </a:p>
                   </a:txBody>
@@ -18527,24 +19950,24 @@
                   </a:tcPr>
                 </a:tc>
               </a:tr>
-              <a:tr h="484632">
-                <a:tc>
-                  <a:txBody>
-                    <a:bodyPr/>
-                    <a:lstStyle/>
-                    <a:p>
-                      <a:pPr algn="l">
-                        <a:lnSpc>
-                          <a:spcPct val="92000"/>
-                        </a:lnSpc>
-                      </a:pPr>
-                      <a:r>
-                        <a:rPr sz="1050" b="0">
-                          <a:solidFill>
-                            <a:srgbClr val="1F3B63"/>
-                          </a:solidFill>
-                        </a:rPr>
-                        <a:t>Behaviour</a:t>
+              <a:tr h="411480">
+                <a:tc>
+                  <a:txBody>
+                    <a:bodyPr/>
+                    <a:lstStyle/>
+                    <a:p>
+                      <a:pPr algn="l">
+                        <a:lnSpc>
+                          <a:spcPct val="92000"/>
+                        </a:lnSpc>
+                      </a:pPr>
+                      <a:r>
+                        <a:rPr sz="1000" b="0">
+                          <a:solidFill>
+                            <a:srgbClr val="1F3B63"/>
+                          </a:solidFill>
+                        </a:rPr>
+                        <a:t>Abstinence</a:t>
                       </a:r>
                     </a:p>
                   </a:txBody>
@@ -18565,27 +19988,12 @@
                         </a:lnSpc>
                       </a:pPr>
                       <a:r>
-                        <a:rPr sz="1050" b="0">
-                          <a:solidFill>
-                            <a:srgbClr val="1F3B63"/>
-                          </a:solidFill>
-                        </a:rPr>
-                        <a:t>Unchanged, days 1-18</a:t>
-                      </a:r>
-                    </a:p>
-                    <a:p>
-                      <a:pPr algn="l">
-                        <a:lnSpc>
-                          <a:spcPct val="92000"/>
-                        </a:lnSpc>
-                      </a:pPr>
-                      <a:r>
-                        <a:rPr sz="1050" b="0">
-                          <a:solidFill>
-                            <a:srgbClr val="1F3B63"/>
-                          </a:solidFill>
-                        </a:rPr>
-                        <a:t>(FR, Pre, During, Post, Withdrawal, Re-exposure)</a:t>
+                        <a:rPr sz="1000" b="0">
+                          <a:solidFill>
+                            <a:srgbClr val="1F3B63"/>
+                          </a:solidFill>
+                        </a:rPr>
+                        <a:t>Days 19-31, home cage</a:t>
                       </a:r>
                     </a:p>
                   </a:txBody>
@@ -18606,12 +20014,12 @@
                         </a:lnSpc>
                       </a:pPr>
                       <a:r>
-                        <a:rPr sz="1050" b="0">
-                          <a:solidFill>
-                            <a:srgbClr val="1F3B63"/>
-                          </a:solidFill>
-                        </a:rPr>
-                        <a:t>Keeping the paradigm identical means the whole-brain TRAP result still maps onto it.</a:t>
+                        <a:rPr sz="1000" b="0">
+                          <a:solidFill>
+                            <a:srgbClr val="1F3B63"/>
+                          </a:solidFill>
+                        </a:rPr>
+                        <a:t>Lets tdTomato accumulate and lets craving incubate.</a:t>
                       </a:r>
                     </a:p>
                   </a:txBody>
@@ -18622,24 +20030,24 @@
                   </a:tcPr>
                 </a:tc>
               </a:tr>
-              <a:tr h="484632">
-                <a:tc>
-                  <a:txBody>
-                    <a:bodyPr/>
-                    <a:lstStyle/>
-                    <a:p>
-                      <a:pPr algn="l">
-                        <a:lnSpc>
-                          <a:spcPct val="92000"/>
-                        </a:lnSpc>
-                      </a:pPr>
-                      <a:r>
-                        <a:rPr sz="1050" b="0">
-                          <a:solidFill>
-                            <a:srgbClr val="1F3B63"/>
-                          </a:solidFill>
-                        </a:rPr>
-                        <a:t>Abstinence</a:t>
+              <a:tr h="411480">
+                <a:tc>
+                  <a:txBody>
+                    <a:bodyPr/>
+                    <a:lstStyle/>
+                    <a:p>
+                      <a:pPr algn="l">
+                        <a:lnSpc>
+                          <a:spcPct val="92000"/>
+                        </a:lnSpc>
+                      </a:pPr>
+                      <a:r>
+                        <a:rPr sz="1000" b="0">
+                          <a:solidFill>
+                            <a:srgbClr val="1F3B63"/>
+                          </a:solidFill>
+                        </a:rPr>
+                        <a:t>Readout day</a:t>
                       </a:r>
                     </a:p>
                   </a:txBody>
@@ -18660,12 +20068,27 @@
                         </a:lnSpc>
                       </a:pPr>
                       <a:r>
-                        <a:rPr sz="1050" b="0">
-                          <a:solidFill>
-                            <a:srgbClr val="1F3B63"/>
-                          </a:solidFill>
-                        </a:rPr>
-                        <a:t>Days 19-31, home cage</a:t>
+                        <a:rPr sz="1000" b="0">
+                          <a:solidFill>
+                            <a:srgbClr val="1F3B63"/>
+                          </a:solidFill>
+                        </a:rPr>
+                        <a:t>Day 32: cue-induced seeking test,</a:t>
+                      </a:r>
+                    </a:p>
+                    <a:p>
+                      <a:pPr algn="l">
+                        <a:lnSpc>
+                          <a:spcPct val="92000"/>
+                        </a:lnSpc>
+                      </a:pPr>
+                      <a:r>
+                        <a:rPr sz="1000" b="0">
+                          <a:solidFill>
+                            <a:srgbClr val="1F3B63"/>
+                          </a:solidFill>
+                        </a:rPr>
+                        <a:t>sacrifice 90 min later</a:t>
                       </a:r>
                     </a:p>
                   </a:txBody>
@@ -18686,12 +20109,12 @@
                         </a:lnSpc>
                       </a:pPr>
                       <a:r>
-                        <a:rPr sz="1050" b="0">
-                          <a:solidFill>
-                            <a:srgbClr val="1F3B63"/>
-                          </a:solidFill>
-                        </a:rPr>
-                        <a:t>Lets tdTomato accumulate and lets craving incubate.</a:t>
+                        <a:rPr sz="1000" b="0">
+                          <a:solidFill>
+                            <a:srgbClr val="1F3B63"/>
+                          </a:solidFill>
+                        </a:rPr>
+                        <a:t>20 days after tagging: well past your 10-day minimum, and Fos from the test is at peak.</a:t>
                       </a:r>
                     </a:p>
                   </a:txBody>
@@ -18702,24 +20125,24 @@
                   </a:tcPr>
                 </a:tc>
               </a:tr>
-              <a:tr h="484632">
-                <a:tc>
-                  <a:txBody>
-                    <a:bodyPr/>
-                    <a:lstStyle/>
-                    <a:p>
-                      <a:pPr algn="l">
-                        <a:lnSpc>
-                          <a:spcPct val="92000"/>
-                        </a:lnSpc>
-                      </a:pPr>
-                      <a:r>
-                        <a:rPr sz="1050" b="0">
-                          <a:solidFill>
-                            <a:srgbClr val="1F3B63"/>
-                          </a:solidFill>
-                        </a:rPr>
-                        <a:t>Readout day</a:t>
+              <a:tr h="411480">
+                <a:tc>
+                  <a:txBody>
+                    <a:bodyPr/>
+                    <a:lstStyle/>
+                    <a:p>
+                      <a:pPr algn="l">
+                        <a:lnSpc>
+                          <a:spcPct val="92000"/>
+                        </a:lnSpc>
+                      </a:pPr>
+                      <a:r>
+                        <a:rPr sz="1000" b="0">
+                          <a:solidFill>
+                            <a:srgbClr val="1F3B63"/>
+                          </a:solidFill>
+                        </a:rPr>
+                        <a:t>Tissue</a:t>
                       </a:r>
                     </a:p>
                   </a:txBody>
@@ -18740,27 +20163,27 @@
                         </a:lnSpc>
                       </a:pPr>
                       <a:r>
-                        <a:rPr sz="1050" b="0">
-                          <a:solidFill>
-                            <a:srgbClr val="1F3B63"/>
-                          </a:solidFill>
-                        </a:rPr>
-                        <a:t>Day 32: cue-induced seeking test,</a:t>
-                      </a:r>
-                    </a:p>
-                    <a:p>
-                      <a:pPr algn="l">
-                        <a:lnSpc>
-                          <a:spcPct val="92000"/>
-                        </a:lnSpc>
-                      </a:pPr>
-                      <a:r>
-                        <a:rPr sz="1050" b="0">
-                          <a:solidFill>
-                            <a:srgbClr val="1F3B63"/>
-                          </a:solidFill>
-                        </a:rPr>
-                        <a:t>sacrifice 90 min later</a:t>
+                        <a:rPr sz="1000" b="0">
+                          <a:solidFill>
+                            <a:srgbClr val="1F3B63"/>
+                          </a:solidFill>
+                        </a:rPr>
+                        <a:t>ORBm and BMAp coronal sections;</a:t>
+                      </a:r>
+                    </a:p>
+                    <a:p>
+                      <a:pPr algn="l">
+                        <a:lnSpc>
+                          <a:spcPct val="92000"/>
+                        </a:lnSpc>
+                      </a:pPr>
+                      <a:r>
+                        <a:rPr sz="1000" b="0">
+                          <a:solidFill>
+                            <a:srgbClr val="1F3B63"/>
+                          </a:solidFill>
+                        </a:rPr>
+                        <a:t>Active and Passive on the SAME slide</a:t>
                       </a:r>
                     </a:p>
                   </a:txBody>
@@ -18781,12 +20204,12 @@
                         </a:lnSpc>
                       </a:pPr>
                       <a:r>
-                        <a:rPr sz="1050" b="0">
-                          <a:solidFill>
-                            <a:srgbClr val="1F3B63"/>
-                          </a:solidFill>
-                        </a:rPr>
-                        <a:t>20 days after tagging: well past your 10-day minimum, and Fos from the test is at peak.</a:t>
+                        <a:rPr sz="1000" b="0">
+                          <a:solidFill>
+                            <a:srgbClr val="1F3B63"/>
+                          </a:solidFill>
+                        </a:rPr>
+                        <a:t>Puts the group comparison inside a slide instead of across slides.</a:t>
                       </a:r>
                     </a:p>
                   </a:txBody>
@@ -18797,24 +20220,24 @@
                   </a:tcPr>
                 </a:tc>
               </a:tr>
-              <a:tr h="484632">
-                <a:tc>
-                  <a:txBody>
-                    <a:bodyPr/>
-                    <a:lstStyle/>
-                    <a:p>
-                      <a:pPr algn="l">
-                        <a:lnSpc>
-                          <a:spcPct val="92000"/>
-                        </a:lnSpc>
-                      </a:pPr>
-                      <a:r>
-                        <a:rPr sz="1050" b="0">
-                          <a:solidFill>
-                            <a:srgbClr val="1F3B63"/>
-                          </a:solidFill>
-                        </a:rPr>
-                        <a:t>Tissue</a:t>
+              <a:tr h="411480">
+                <a:tc>
+                  <a:txBody>
+                    <a:bodyPr/>
+                    <a:lstStyle/>
+                    <a:p>
+                      <a:pPr algn="l">
+                        <a:lnSpc>
+                          <a:spcPct val="92000"/>
+                        </a:lnSpc>
+                      </a:pPr>
+                      <a:r>
+                        <a:rPr sz="1000" b="0">
+                          <a:solidFill>
+                            <a:srgbClr val="1F3B63"/>
+                          </a:solidFill>
+                        </a:rPr>
+                        <a:t>Readouts</a:t>
                       </a:r>
                     </a:p>
                   </a:txBody>
@@ -18835,27 +20258,27 @@
                         </a:lnSpc>
                       </a:pPr>
                       <a:r>
-                        <a:rPr sz="1050" b="0">
-                          <a:solidFill>
-                            <a:srgbClr val="1F3B63"/>
-                          </a:solidFill>
-                        </a:rPr>
-                        <a:t>ORBm and BMAp coronal sections;</a:t>
-                      </a:r>
-                    </a:p>
-                    <a:p>
-                      <a:pPr algn="l">
-                        <a:lnSpc>
-                          <a:spcPct val="92000"/>
-                        </a:lnSpc>
-                      </a:pPr>
-                      <a:r>
-                        <a:rPr sz="1050" b="0">
-                          <a:solidFill>
-                            <a:srgbClr val="1F3B63"/>
-                          </a:solidFill>
-                        </a:rPr>
-                        <a:t>Active and Passive on the SAME slide</a:t>
+                        <a:rPr sz="1000" b="0">
+                          <a:solidFill>
+                            <a:srgbClr val="1F3B63"/>
+                          </a:solidFill>
+                        </a:rPr>
+                        <a:t>tdTomato (Post ensemble) + Fos (relapse</a:t>
+                      </a:r>
+                    </a:p>
+                    <a:p>
+                      <a:pPr algn="l">
+                        <a:lnSpc>
+                          <a:spcPct val="92000"/>
+                        </a:lnSpc>
+                      </a:pPr>
+                      <a:r>
+                        <a:rPr sz="1000" b="0">
+                          <a:solidFill>
+                            <a:srgbClr val="1F3B63"/>
+                          </a:solidFill>
+                        </a:rPr>
+                        <a:t>ensemble) + 20 subclasses + GPCRs</a:t>
                       </a:r>
                     </a:p>
                   </a:txBody>
@@ -18876,113 +20299,18 @@
                         </a:lnSpc>
                       </a:pPr>
                       <a:r>
-                        <a:rPr sz="1050" b="0">
-                          <a:solidFill>
-                            <a:srgbClr val="1F3B63"/>
-                          </a:solidFill>
-                        </a:rPr>
-                        <a:t>Puts the group comparison inside a slide instead of across slides.</a:t>
+                        <a:rPr sz="1000" b="0">
+                          <a:solidFill>
+                            <a:srgbClr val="1F3B63"/>
+                          </a:solidFill>
+                        </a:rPr>
+                        <a:t>The overlap of tdTomato and Fos is the single most informative measurement here.</a:t>
                       </a:r>
                     </a:p>
                   </a:txBody>
                   <a:tcPr anchor="ctr" marL="54864" marR="54864" marT="18288" marB="18288">
                     <a:solidFill>
                       <a:srgbClr val="FFFFFF"/>
-                    </a:solidFill>
-                  </a:tcPr>
-                </a:tc>
-              </a:tr>
-              <a:tr h="484632">
-                <a:tc>
-                  <a:txBody>
-                    <a:bodyPr/>
-                    <a:lstStyle/>
-                    <a:p>
-                      <a:pPr algn="l">
-                        <a:lnSpc>
-                          <a:spcPct val="92000"/>
-                        </a:lnSpc>
-                      </a:pPr>
-                      <a:r>
-                        <a:rPr sz="1050" b="0">
-                          <a:solidFill>
-                            <a:srgbClr val="1F3B63"/>
-                          </a:solidFill>
-                        </a:rPr>
-                        <a:t>Readouts</a:t>
-                      </a:r>
-                    </a:p>
-                  </a:txBody>
-                  <a:tcPr anchor="ctr" marL="54864" marR="54864" marT="18288" marB="18288">
-                    <a:solidFill>
-                      <a:srgbClr val="EEF3F9"/>
-                    </a:solidFill>
-                  </a:tcPr>
-                </a:tc>
-                <a:tc>
-                  <a:txBody>
-                    <a:bodyPr/>
-                    <a:lstStyle/>
-                    <a:p>
-                      <a:pPr algn="l">
-                        <a:lnSpc>
-                          <a:spcPct val="92000"/>
-                        </a:lnSpc>
-                      </a:pPr>
-                      <a:r>
-                        <a:rPr sz="1050" b="0">
-                          <a:solidFill>
-                            <a:srgbClr val="1F3B63"/>
-                          </a:solidFill>
-                        </a:rPr>
-                        <a:t>tdTomato (Post ensemble) + Fos (relapse</a:t>
-                      </a:r>
-                    </a:p>
-                    <a:p>
-                      <a:pPr algn="l">
-                        <a:lnSpc>
-                          <a:spcPct val="92000"/>
-                        </a:lnSpc>
-                      </a:pPr>
-                      <a:r>
-                        <a:rPr sz="1050" b="0">
-                          <a:solidFill>
-                            <a:srgbClr val="1F3B63"/>
-                          </a:solidFill>
-                        </a:rPr>
-                        <a:t>ensemble) + 20 subclasses + GPCRs</a:t>
-                      </a:r>
-                    </a:p>
-                  </a:txBody>
-                  <a:tcPr anchor="ctr" marL="54864" marR="54864" marT="18288" marB="18288">
-                    <a:solidFill>
-                      <a:srgbClr val="EEF3F9"/>
-                    </a:solidFill>
-                  </a:tcPr>
-                </a:tc>
-                <a:tc>
-                  <a:txBody>
-                    <a:bodyPr/>
-                    <a:lstStyle/>
-                    <a:p>
-                      <a:pPr algn="l">
-                        <a:lnSpc>
-                          <a:spcPct val="92000"/>
-                        </a:lnSpc>
-                      </a:pPr>
-                      <a:r>
-                        <a:rPr sz="1050" b="0">
-                          <a:solidFill>
-                            <a:srgbClr val="1F3B63"/>
-                          </a:solidFill>
-                        </a:rPr>
-                        <a:t>The overlap of tdTomato and Fos is the single most informative measurement here.</a:t>
-                      </a:r>
-                    </a:p>
-                  </a:txBody>
-                  <a:tcPr anchor="ctr" marL="54864" marR="54864" marT="18288" marB="18288">
-                    <a:solidFill>
-                      <a:srgbClr val="EEF3F9"/>
                     </a:solidFill>
                   </a:tcPr>
                 </a:tc>
@@ -18999,7 +20327,7 @@
         </p:nvSpPr>
         <p:spPr>
           <a:xfrm>
-            <a:off x="502920" y="5870448"/>
+            <a:off x="502920" y="5779008"/>
             <a:ext cx="11185855" cy="548640"/>
           </a:xfrm>
           <a:prstGeom prst="rect">
@@ -19088,7 +20416,7 @@
                   <a:srgbClr val="595959"/>
                 </a:solidFill>
               </a:rPr>
-              <a:t>TRAP2 6-h window and 50 mg/kg 4-OHT: DeNardo et al. 2019 Nat Neurosci.</a:t>
+              <a:t>TRAP2 6-h window, 50 mg/kg 4-OHT and 48-h single housing before tagging: DeNardo et al. 2019 Nat Neurosci.</a:t>
             </a:r>
           </a:p>
         </p:txBody>
@@ -19188,7 +20516,7 @@
                   <a:srgbClr val="1F3B63"/>
                 </a:solidFill>
               </a:rPr>
-              <a:t>Experiment 1 — the panel is built, with one procurement risk</a:t>
+              <a:t>Experiment 1 — the panel fits, at half the add-on budget</a:t>
             </a:r>
           </a:p>
         </p:txBody>
@@ -19229,7 +20557,7 @@
                   <a:srgbClr val="595959"/>
                 </a:solidFill>
               </a:rPr>
-              <a:t>168 genes in four blocks; the risk is the 100-gene cap on custom add-ons</a:t>
+              <a:t>I matched our list against the real 10x base panel: the 77 priority-1 genes need only 51 of the 100 custom slots</a:t>
             </a:r>
           </a:p>
         </p:txBody>
@@ -19288,7 +20616,7 @@
         </p:nvGraphicFramePr>
         <p:xfrm>
           <a:off x="502920" y="1298448"/>
-          <a:ext cx="6537960" cy="2157984"/>
+          <a:ext cx="6537960" cy="2139696"/>
         </p:xfrm>
         <a:graphic>
           <a:graphicData uri="http://schemas.openxmlformats.org/drawingml/2006/table">
@@ -19297,13 +20625,13 @@
                 <a:tableStyleId>{5C22544A-7EE6-4342-B048-85BDC9FD1C3A}</a:tableStyleId>
               </a:tblPr>
               <a:tblGrid>
-                <a:gridCol w="2095500"/>
-                <a:gridCol w="2514600"/>
-                <a:gridCol w="628650"/>
-                <a:gridCol w="628650"/>
-                <a:gridCol w="670560"/>
+                <a:gridCol w="1965960"/>
+                <a:gridCol w="2651760"/>
+                <a:gridCol w="640080"/>
+                <a:gridCol w="594360"/>
+                <a:gridCol w="685800"/>
               </a:tblGrid>
-              <a:tr h="292608">
+              <a:tr h="274320">
                 <a:tc>
                   <a:txBody>
                     <a:bodyPr/>
@@ -19372,7 +20700,7 @@
                             <a:srgbClr val="FFFFFF"/>
                           </a:solidFill>
                         </a:rPr>
-                        <a:t>BMAp</a:t>
+                        <a:t>Genes</a:t>
                       </a:r>
                     </a:p>
                   </a:txBody>
@@ -19398,7 +20726,7 @@
                             <a:srgbClr val="FFFFFF"/>
                           </a:solidFill>
                         </a:rPr>
-                        <a:t>ORBm</a:t>
+                        <a:t>Free</a:t>
                       </a:r>
                     </a:p>
                   </a:txBody>
@@ -19424,7 +20752,7 @@
                             <a:srgbClr val="FFFFFF"/>
                           </a:solidFill>
                         </a:rPr>
-                        <a:t>Union</a:t>
+                        <a:t>Add-on</a:t>
                       </a:r>
                     </a:p>
                   </a:txBody>
@@ -19452,7 +20780,7 @@
                             <a:srgbClr val="1F3B63"/>
                           </a:solidFill>
                         </a:rPr>
-                        <a:t>1  Cell-type unique markers</a:t>
+                        <a:t>1  Cell-type unique</a:t>
                       </a:r>
                     </a:p>
                   </a:txBody>
@@ -19478,7 +20806,7 @@
                             <a:srgbClr val="1F3B63"/>
                           </a:solidFill>
                         </a:rPr>
-                        <a:t>Which of the 20 populations is this cell?</a:t>
+                        <a:t>Which of the 20 populations is this?</a:t>
                       </a:r>
                     </a:p>
                   </a:txBody>
@@ -19504,7 +20832,7 @@
                             <a:srgbClr val="1F3B63"/>
                           </a:solidFill>
                         </a:rPr>
-                        <a:t>68</a:t>
+                        <a:t>62</a:t>
                       </a:r>
                     </a:p>
                   </a:txBody>
@@ -19530,7 +20858,7 @@
                             <a:srgbClr val="1F3B63"/>
                           </a:solidFill>
                         </a:rPr>
-                        <a:t>77</a:t>
+                        <a:t>20</a:t>
                       </a:r>
                     </a:p>
                   </a:txBody>
@@ -19556,7 +20884,7 @@
                             <a:srgbClr val="1F3B63"/>
                           </a:solidFill>
                         </a:rPr>
-                        <a:t>—</a:t>
+                        <a:t>42</a:t>
                       </a:r>
                     </a:p>
                   </a:txBody>
@@ -19584,7 +20912,7 @@
                             <a:srgbClr val="1F3B63"/>
                           </a:solidFill>
                         </a:rPr>
-                        <a:t>2  Cell-type-specific GPCRs</a:t>
+                        <a:t>2  Cell-type GPCRs</a:t>
                       </a:r>
                     </a:p>
                   </a:txBody>
@@ -19610,7 +20938,7 @@
                             <a:srgbClr val="1F3B63"/>
                           </a:solidFill>
                         </a:rPr>
-                        <a:t>Druggable AND informative about cell type</a:t>
+                        <a:t>Druggable AND cell-type informative</a:t>
                       </a:r>
                     </a:p>
                   </a:txBody>
@@ -19636,59 +20964,59 @@
                             <a:srgbClr val="1F3B63"/>
                           </a:solidFill>
                         </a:rPr>
+                        <a:t>7</a:t>
+                      </a:r>
+                    </a:p>
+                  </a:txBody>
+                  <a:tcPr anchor="ctr" marL="54864" marR="54864" marT="18288" marB="18288">
+                    <a:solidFill>
+                      <a:srgbClr val="EEF3F9"/>
+                    </a:solidFill>
+                  </a:tcPr>
+                </a:tc>
+                <a:tc>
+                  <a:txBody>
+                    <a:bodyPr/>
+                    <a:lstStyle/>
+                    <a:p>
+                      <a:pPr algn="ctr">
+                        <a:lnSpc>
+                          <a:spcPct val="92000"/>
+                        </a:lnSpc>
+                      </a:pPr>
+                      <a:r>
+                        <a:rPr sz="1050" b="0">
+                          <a:solidFill>
+                            <a:srgbClr val="1F3B63"/>
+                          </a:solidFill>
+                        </a:rPr>
+                        <a:t>1</a:t>
+                      </a:r>
+                    </a:p>
+                  </a:txBody>
+                  <a:tcPr anchor="ctr" marL="54864" marR="54864" marT="18288" marB="18288">
+                    <a:solidFill>
+                      <a:srgbClr val="EEF3F9"/>
+                    </a:solidFill>
+                  </a:tcPr>
+                </a:tc>
+                <a:tc>
+                  <a:txBody>
+                    <a:bodyPr/>
+                    <a:lstStyle/>
+                    <a:p>
+                      <a:pPr algn="ctr">
+                        <a:lnSpc>
+                          <a:spcPct val="92000"/>
+                        </a:lnSpc>
+                      </a:pPr>
+                      <a:r>
+                        <a:rPr sz="1050" b="0">
+                          <a:solidFill>
+                            <a:srgbClr val="1F3B63"/>
+                          </a:solidFill>
+                        </a:rPr>
                         <a:t>6</a:t>
-                      </a:r>
-                    </a:p>
-                  </a:txBody>
-                  <a:tcPr anchor="ctr" marL="54864" marR="54864" marT="18288" marB="18288">
-                    <a:solidFill>
-                      <a:srgbClr val="EEF3F9"/>
-                    </a:solidFill>
-                  </a:tcPr>
-                </a:tc>
-                <a:tc>
-                  <a:txBody>
-                    <a:bodyPr/>
-                    <a:lstStyle/>
-                    <a:p>
-                      <a:pPr algn="ctr">
-                        <a:lnSpc>
-                          <a:spcPct val="92000"/>
-                        </a:lnSpc>
-                      </a:pPr>
-                      <a:r>
-                        <a:rPr sz="1050" b="0">
-                          <a:solidFill>
-                            <a:srgbClr val="1F3B63"/>
-                          </a:solidFill>
-                        </a:rPr>
-                        <a:t>3</a:t>
-                      </a:r>
-                    </a:p>
-                  </a:txBody>
-                  <a:tcPr anchor="ctr" marL="54864" marR="54864" marT="18288" marB="18288">
-                    <a:solidFill>
-                      <a:srgbClr val="EEF3F9"/>
-                    </a:solidFill>
-                  </a:tcPr>
-                </a:tc>
-                <a:tc>
-                  <a:txBody>
-                    <a:bodyPr/>
-                    <a:lstStyle/>
-                    <a:p>
-                      <a:pPr algn="ctr">
-                        <a:lnSpc>
-                          <a:spcPct val="92000"/>
-                        </a:lnSpc>
-                      </a:pPr>
-                      <a:r>
-                        <a:rPr sz="1050" b="0">
-                          <a:solidFill>
-                            <a:srgbClr val="1F3B63"/>
-                          </a:solidFill>
-                        </a:rPr>
-                        <a:t>—</a:t>
                       </a:r>
                     </a:p>
                   </a:txBody>
@@ -19716,7 +21044,7 @@
                             <a:srgbClr val="1F3B63"/>
                           </a:solidFill>
                         </a:rPr>
-                        <a:t>3  Broad GPCRs / shared markers</a:t>
+                        <a:t>4  IEG + reporter + class</a:t>
                       </a:r>
                     </a:p>
                   </a:txBody>
@@ -19742,7 +21070,7 @@
                             <a:srgbClr val="1F3B63"/>
                           </a:solidFill>
                         </a:rPr>
-                        <a:t>Druggable but group-level only</a:t>
+                        <a:t>Active? TRAPped? Which class?</a:t>
                       </a:r>
                     </a:p>
                   </a:txBody>
@@ -19768,7 +21096,7 @@
                             <a:srgbClr val="1F3B63"/>
                           </a:solidFill>
                         </a:rPr>
-                        <a:t>29</a:t>
+                        <a:t>8</a:t>
                       </a:r>
                     </a:p>
                   </a:txBody>
@@ -19794,7 +21122,7 @@
                             <a:srgbClr val="1F3B63"/>
                           </a:solidFill>
                         </a:rPr>
-                        <a:t>29</a:t>
+                        <a:t>5</a:t>
                       </a:r>
                     </a:p>
                   </a:txBody>
@@ -19820,7 +21148,7 @@
                             <a:srgbClr val="1F3B63"/>
                           </a:solidFill>
                         </a:rPr>
-                        <a:t>—</a:t>
+                        <a:t>3</a:t>
                       </a:r>
                     </a:p>
                   </a:txBody>
@@ -19848,13 +21176,13 @@
                             <a:srgbClr val="1F3B63"/>
                           </a:solidFill>
                         </a:rPr>
-                        <a:t>4  IEG + reporter + backbone</a:t>
-                      </a:r>
-                    </a:p>
-                  </a:txBody>
-                  <a:tcPr anchor="ctr" marL="54864" marR="54864" marT="18288" marB="18288">
-                    <a:solidFill>
-                      <a:srgbClr val="EEF3F9"/>
+                        <a:t>PRIORITY-1 TOTAL</a:t>
+                      </a:r>
+                    </a:p>
+                  </a:txBody>
+                  <a:tcPr anchor="ctr" marL="54864" marR="54864" marT="18288" marB="18288">
+                    <a:solidFill>
+                      <a:srgbClr val="FFF2CC"/>
                     </a:solidFill>
                   </a:tcPr>
                 </a:tc>
@@ -19874,13 +21202,13 @@
                             <a:srgbClr val="1F3B63"/>
                           </a:solidFill>
                         </a:rPr>
-                        <a:t>Was it active, was it TRAPped, what class</a:t>
-                      </a:r>
-                    </a:p>
-                  </a:txBody>
-                  <a:tcPr anchor="ctr" marL="54864" marR="54864" marT="18288" marB="18288">
-                    <a:solidFill>
-                      <a:srgbClr val="EEF3F9"/>
+                        <a:t>What we order: BMAp 38, ORBm 52</a:t>
+                      </a:r>
+                    </a:p>
+                  </a:txBody>
+                  <a:tcPr anchor="ctr" marL="54864" marR="54864" marT="18288" marB="18288">
+                    <a:solidFill>
+                      <a:srgbClr val="FFF2CC"/>
                     </a:solidFill>
                   </a:tcPr>
                 </a:tc>
@@ -19900,13 +21228,13 @@
                             <a:srgbClr val="1F3B63"/>
                           </a:solidFill>
                         </a:rPr>
-                        <a:t>21</a:t>
-                      </a:r>
-                    </a:p>
-                  </a:txBody>
-                  <a:tcPr anchor="ctr" marL="54864" marR="54864" marT="18288" marB="18288">
-                    <a:solidFill>
-                      <a:srgbClr val="EEF3F9"/>
+                        <a:t>77</a:t>
+                      </a:r>
+                    </a:p>
+                  </a:txBody>
+                  <a:tcPr anchor="ctr" marL="54864" marR="54864" marT="18288" marB="18288">
+                    <a:solidFill>
+                      <a:srgbClr val="FFF2CC"/>
                     </a:solidFill>
                   </a:tcPr>
                 </a:tc>
@@ -19926,13 +21254,13 @@
                             <a:srgbClr val="1F3B63"/>
                           </a:solidFill>
                         </a:rPr>
-                        <a:t>19</a:t>
-                      </a:r>
-                    </a:p>
-                  </a:txBody>
-                  <a:tcPr anchor="ctr" marL="54864" marR="54864" marT="18288" marB="18288">
-                    <a:solidFill>
-                      <a:srgbClr val="EEF3F9"/>
+                        <a:t>26</a:t>
+                      </a:r>
+                    </a:p>
+                  </a:txBody>
+                  <a:tcPr anchor="ctr" marL="54864" marR="54864" marT="18288" marB="18288">
+                    <a:solidFill>
+                      <a:srgbClr val="FFF2CC"/>
                     </a:solidFill>
                   </a:tcPr>
                 </a:tc>
@@ -19952,13 +21280,13 @@
                             <a:srgbClr val="1F3B63"/>
                           </a:solidFill>
                         </a:rPr>
-                        <a:t>—</a:t>
-                      </a:r>
-                    </a:p>
-                  </a:txBody>
-                  <a:tcPr anchor="ctr" marL="54864" marR="54864" marT="18288" marB="18288">
-                    <a:solidFill>
-                      <a:srgbClr val="EEF3F9"/>
+                        <a:t>51</a:t>
+                      </a:r>
+                    </a:p>
+                  </a:txBody>
+                  <a:tcPr anchor="ctr" marL="54864" marR="54864" marT="18288" marB="18288">
+                    <a:solidFill>
+                      <a:srgbClr val="FFF2CC"/>
                     </a:solidFill>
                   </a:tcPr>
                 </a:tc>
@@ -19980,31 +21308,39 @@
                             <a:srgbClr val="1F3B63"/>
                           </a:solidFill>
                         </a:rPr>
-                        <a:t>TOTAL genes to order</a:t>
-                      </a:r>
-                    </a:p>
-                  </a:txBody>
-                  <a:tcPr anchor="ctr" marL="54864" marR="54864" marT="18288" marB="18288">
-                    <a:solidFill>
-                      <a:srgbClr val="FFF2CC"/>
-                    </a:solidFill>
-                  </a:tcPr>
-                </a:tc>
-                <a:tc>
-                  <a:txBody>
-                    <a:bodyPr/>
-                    <a:lstStyle/>
-                    <a:p>
-                      <a:pPr algn="l">
-                        <a:lnSpc>
-                          <a:spcPct val="92000"/>
-                        </a:lnSpc>
-                      </a:pPr>
-                    </a:p>
-                  </a:txBody>
-                  <a:tcPr anchor="ctr" marL="54864" marR="54864" marT="18288" marB="18288">
-                    <a:solidFill>
-                      <a:srgbClr val="FFF2CC"/>
+                        <a:t>10x add-on cap</a:t>
+                      </a:r>
+                    </a:p>
+                  </a:txBody>
+                  <a:tcPr anchor="ctr" marL="54864" marR="54864" marT="18288" marB="18288">
+                    <a:solidFill>
+                      <a:srgbClr val="FFFFFF"/>
+                    </a:solidFill>
+                  </a:tcPr>
+                </a:tc>
+                <a:tc>
+                  <a:txBody>
+                    <a:bodyPr/>
+                    <a:lstStyle/>
+                    <a:p>
+                      <a:pPr algn="l">
+                        <a:lnSpc>
+                          <a:spcPct val="92000"/>
+                        </a:lnSpc>
+                      </a:pPr>
+                      <a:r>
+                        <a:rPr sz="1050" b="0">
+                          <a:solidFill>
+                            <a:srgbClr val="1F3B63"/>
+                          </a:solidFill>
+                        </a:rPr>
+                        <a:t>Limit on a pre-designed panel</a:t>
+                      </a:r>
+                    </a:p>
+                  </a:txBody>
+                  <a:tcPr anchor="ctr" marL="54864" marR="54864" marT="18288" marB="18288">
+                    <a:solidFill>
+                      <a:srgbClr val="FFFFFF"/>
                     </a:solidFill>
                   </a:tcPr>
                 </a:tc>
@@ -20024,13 +21360,13 @@
                             <a:srgbClr val="1F3B63"/>
                           </a:solidFill>
                         </a:rPr>
-                        <a:t>124</a:t>
-                      </a:r>
-                    </a:p>
-                  </a:txBody>
-                  <a:tcPr anchor="ctr" marL="54864" marR="54864" marT="18288" marB="18288">
-                    <a:solidFill>
-                      <a:srgbClr val="FFF2CC"/>
+                        <a:t>—</a:t>
+                      </a:r>
+                    </a:p>
+                  </a:txBody>
+                  <a:tcPr anchor="ctr" marL="54864" marR="54864" marT="18288" marB="18288">
+                    <a:solidFill>
+                      <a:srgbClr val="FFFFFF"/>
                     </a:solidFill>
                   </a:tcPr>
                 </a:tc>
@@ -20050,13 +21386,13 @@
                             <a:srgbClr val="1F3B63"/>
                           </a:solidFill>
                         </a:rPr>
-                        <a:t>128</a:t>
-                      </a:r>
-                    </a:p>
-                  </a:txBody>
-                  <a:tcPr anchor="ctr" marL="54864" marR="54864" marT="18288" marB="18288">
-                    <a:solidFill>
-                      <a:srgbClr val="FFF2CC"/>
+                        <a:t>—</a:t>
+                      </a:r>
+                    </a:p>
+                  </a:txBody>
+                  <a:tcPr anchor="ctr" marL="54864" marR="54864" marT="18288" marB="18288">
+                    <a:solidFill>
+                      <a:srgbClr val="FFFFFF"/>
                     </a:solidFill>
                   </a:tcPr>
                 </a:tc>
@@ -20076,13 +21412,13 @@
                             <a:srgbClr val="1F3B63"/>
                           </a:solidFill>
                         </a:rPr>
-                        <a:t>168</a:t>
-                      </a:r>
-                    </a:p>
-                  </a:txBody>
-                  <a:tcPr anchor="ctr" marL="54864" marR="54864" marT="18288" marB="18288">
-                    <a:solidFill>
-                      <a:srgbClr val="FFF2CC"/>
+                        <a:t>100</a:t>
+                      </a:r>
+                    </a:p>
+                  </a:txBody>
+                  <a:tcPr anchor="ctr" marL="54864" marR="54864" marT="18288" marB="18288">
+                    <a:solidFill>
+                      <a:srgbClr val="FFFFFF"/>
                     </a:solidFill>
                   </a:tcPr>
                 </a:tc>
@@ -20104,7 +21440,7 @@
                             <a:srgbClr val="1F3B63"/>
                           </a:solidFill>
                         </a:rPr>
-                        <a:t>Minimum that still IDs all 20</a:t>
+                        <a:t>Slots still free</a:t>
                       </a:r>
                     </a:p>
                   </a:txBody>
@@ -20124,6 +21460,14 @@
                           <a:spcPct val="92000"/>
                         </a:lnSpc>
                       </a:pPr>
+                      <a:r>
+                        <a:rPr sz="1050" b="0">
+                          <a:solidFill>
+                            <a:srgbClr val="1F3B63"/>
+                          </a:solidFill>
+                        </a:rPr>
+                        <a:t>Room for priority-2 backups</a:t>
+                      </a:r>
                     </a:p>
                   </a:txBody>
                   <a:tcPr anchor="ctr" marL="54864" marR="54864" marT="18288" marB="18288">
@@ -20148,7 +21492,7 @@
                             <a:srgbClr val="1F3B63"/>
                           </a:solidFill>
                         </a:rPr>
-                        <a:t>38</a:t>
+                        <a:t>—</a:t>
                       </a:r>
                     </a:p>
                   </a:txBody>
@@ -20174,7 +21518,7 @@
                             <a:srgbClr val="1F3B63"/>
                           </a:solidFill>
                         </a:rPr>
-                        <a:t>52</a:t>
+                        <a:t>—</a:t>
                       </a:r>
                     </a:p>
                   </a:txBody>
@@ -20200,7 +21544,7 @@
                             <a:srgbClr val="1F3B63"/>
                           </a:solidFill>
                         </a:rPr>
-                        <a:t>77</a:t>
+                        <a:t>49</a:t>
                       </a:r>
                     </a:p>
                   </a:txBody>
@@ -20223,7 +21567,7 @@
         </p:nvSpPr>
         <p:spPr>
           <a:xfrm>
-            <a:off x="502920" y="4041648"/>
+            <a:off x="502920" y="3794760"/>
             <a:ext cx="6537960" cy="292608"/>
           </a:xfrm>
           <a:prstGeom prst="rect">
@@ -20269,7 +21613,7 @@
                   <a:srgbClr val="FFFFFF"/>
                 </a:solidFill>
               </a:rPr>
-              <a:t>BLOCK 4 IS THE TRAP READOUT — 4 GENES NEED CUSTOM PROBES</a:t>
+              <a:t>THE ONLY PANEL RISK LEFT — TWO CUSTOM-SEQUENCE PROBES</a:t>
             </a:r>
           </a:p>
         </p:txBody>
@@ -20282,8 +21626,8 @@
         </p:nvSpPr>
         <p:spPr>
           <a:xfrm>
-            <a:off x="502920" y="4334256"/>
-            <a:ext cx="6537960" cy="1216152"/>
+            <a:off x="502920" y="4087368"/>
+            <a:ext cx="6537960" cy="1536192"/>
           </a:xfrm>
           <a:prstGeom prst="rect">
             <a:avLst/>
@@ -20325,12 +21669,12 @@
               </a:spcAft>
             </a:pPr>
             <a:r>
-              <a:rPr sz="1150" b="0">
-                <a:solidFill>
-                  <a:srgbClr val="595959"/>
+              <a:rPr sz="1100" b="1">
+                <a:solidFill>
+                  <a:srgbClr val="1F3B63"/>
                 </a:solidFill>
               </a:rPr>
-              <a:t>tdTomato and iCre are not mouse genes. Xenium supports exogenous targets, but 10x does not validate them, so these are at our risk.</a:t>
+              <a:t>tdTomato and iCre are not mouse genes, so they need advanced custom design from a FASTA of at least 80 bp, and 10x does not validate them.</a:t>
             </a:r>
           </a:p>
           <a:p>
@@ -20343,12 +21687,12 @@
               </a:spcAft>
             </a:pPr>
             <a:r>
-              <a:rPr sz="1150" b="0">
+              <a:rPr sz="1100" b="0">
                 <a:solidFill>
                   <a:srgbClr val="595959"/>
                 </a:solidFill>
               </a:rPr>
-              <a:t>tdTomato = the permanent tag (Ai14). iCre = the driver, which separates cells that expressed the driver from cells that completed recombination.</a:t>
+              <a:t>tdTomato in Ai14 is very highly expressed. I will ask 10x to reduce its probe-set count, otherwise it crowds the optical field and depresses counts for every other gene.</a:t>
             </a:r>
           </a:p>
           <a:p>
@@ -20361,12 +21705,12 @@
               </a:spcAft>
             </a:pPr>
             <a:r>
-              <a:rPr sz="1150" b="0">
+              <a:rPr sz="1100" b="0">
                 <a:solidFill>
                   <a:srgbClr val="595959"/>
                 </a:solidFill>
               </a:rPr>
-              <a:t>Fos, Npas4 and Arc give activity at the time of the test; Slc17a7 / Slc17a6 / Gad1 / Gad2 give the neurotransmitter class.</a:t>
+              <a:t>If tdTomato still reads weakly: iCre reports the same cells independently, and tdTomato antibody staining on adjacent sections is a third, orthogonal route.</a:t>
             </a:r>
           </a:p>
         </p:txBody>
@@ -20386,7 +21730,7 @@
             <a:avLst/>
           </a:prstGeom>
           <a:solidFill>
-            <a:srgbClr val="B31B1B"/>
+            <a:srgbClr val="1E6F3C"/>
           </a:solidFill>
           <a:ln>
             <a:noFill/>
@@ -20425,7 +21769,7 @@
                   <a:srgbClr val="FFFFFF"/>
                 </a:solidFill>
               </a:rPr>
-              <a:t>PROCUREMENT RISK — RESOLVE BEFORE ORDERING</a:t>
+              <a:t>WHAT THE CROSS-CHECK CHANGED</a:t>
             </a:r>
           </a:p>
         </p:txBody>
@@ -20439,7 +21783,7 @@
         <p:spPr>
           <a:xfrm>
             <a:off x="7315200" y="1591056"/>
-            <a:ext cx="4370832" cy="2816352"/>
+            <a:ext cx="4370832" cy="4142232"/>
           </a:xfrm>
           <a:prstGeom prst="rect">
             <a:avLst/>
@@ -20481,12 +21825,12 @@
               </a:spcAft>
             </a:pPr>
             <a:r>
-              <a:rPr sz="1150" b="1">
+              <a:rPr sz="1100" b="1">
                 <a:solidFill>
                   <a:srgbClr val="1F3B63"/>
                 </a:solidFill>
               </a:rPr>
-              <a:t>A Xenium custom add-on is capped at 100 genes on top of a pre-designed base panel. Our list is 168.</a:t>
+              <a:t>This was the open procurement risk in my first draft. It is now closed.</a:t>
             </a:r>
           </a:p>
           <a:p>
@@ -20499,12 +21843,12 @@
               </a:spcAft>
             </a:pPr>
             <a:r>
-              <a:rPr sz="1150" b="0">
+              <a:rPr sz="1100" b="0">
                 <a:solidFill>
                   <a:srgbClr val="595959"/>
                 </a:solidFill>
               </a:rPr>
-              <a:t>Option A (preferred): Xenium Prime 5K mouse panel as the base. It should already contain nearly all 164 endogenous genes, leaving only the 4 transgenes as custom.</a:t>
+              <a:t>I pulled the 248-gene Xenium Mouse Brain v1 panel from 10x and matched it gene by gene against our list. 26 of the 77 priority-1 genes are already on it — including Fos and Arc, the two activity readouts — so we do not pay for them.</a:t>
             </a:r>
           </a:p>
           <a:p>
@@ -20517,12 +21861,12 @@
               </a:spcAft>
             </a:pPr>
             <a:r>
-              <a:rPr sz="1150" b="0">
+              <a:rPr sz="1100" b="0">
                 <a:solidFill>
                   <a:srgbClr val="595959"/>
                 </a:solidFill>
               </a:rPr>
-              <a:t>Option B: base mouse brain panel + 100-gene add-on. Feasible because the 77-gene minimum panel plus the transgenes fits inside the cap. This is exactly why I tiered the list.</a:t>
+              <a:t>That leaves 51 add-on slots, half of the 100 available.</a:t>
             </a:r>
           </a:p>
           <a:p>
@@ -20535,73 +21879,89 @@
               </a:spcAft>
             </a:pPr>
             <a:r>
-              <a:rPr sz="1150" b="1">
+              <a:rPr sz="1100" b="0">
+                <a:solidFill>
+                  <a:srgbClr val="595959"/>
+                </a:solidFill>
+              </a:rPr>
+              <a:t>The 49 spare slots absorb 49 of the 85 priority-2 backups, so the panel we order can carry 146 of our 162 curated genes rather than 77.</a:t>
+            </a:r>
+          </a:p>
+          <a:p>
+            <a:pPr algn="l">
+              <a:lnSpc>
+                <a:spcPct val="97000"/>
+              </a:lnSpc>
+              <a:spcAft>
+                <a:spcPts val="500"/>
+              </a:spcAft>
+            </a:pPr>
+            <a:r>
+              <a:rPr sz="1100" b="1">
                 <a:solidFill>
                   <a:srgbClr val="1F3B63"/>
                 </a:solidFill>
               </a:rPr>
-              <a:t>Action: cross-check our 168 genes against the base panel gene lists and get a quote for both options. Two days of work, must happen before the October order.</a:t>
-            </a:r>
-          </a:p>
-        </p:txBody>
-      </p:sp>
-      <p:sp>
-        <p:nvSpPr>
-          <p:cNvPr id="11" name="Rectangle 10"/>
-          <p:cNvSpPr/>
+              <a:t>Consequence for the budget: Xenium Prime 5K is no longer needed. Base Mouse Brain panel plus one add-on does everything, at the lower price point.</a:t>
+            </a:r>
+          </a:p>
+          <a:p>
+            <a:pPr algn="l">
+              <a:lnSpc>
+                <a:spcPct val="97000"/>
+              </a:lnSpc>
+              <a:spcAft>
+                <a:spcPts val="500"/>
+              </a:spcAft>
+            </a:pPr>
+            <a:r>
+              <a:rPr sz="1100" b="0">
+                <a:solidFill>
+                  <a:srgbClr val="595959"/>
+                </a:solidFill>
+              </a:rPr>
+              <a:t>I would not fill all 100 blindly. I propose spending the spare slots on the priority-2 genes that rescue the subclasses which currently have no single unique marker, then on the GPCRs that already have ligands, and holding ~10 slots back.</a:t>
+            </a:r>
+          </a:p>
+        </p:txBody>
+      </p:sp>
+      <p:sp>
+        <p:nvSpPr>
+          <p:cNvPr id="11" name="TextBox 10"/>
+          <p:cNvSpPr txBox="1"/>
           <p:nvPr/>
         </p:nvSpPr>
         <p:spPr>
           <a:xfrm>
-            <a:off x="7315200" y="4050791"/>
-            <a:ext cx="4370832" cy="978408"/>
+            <a:off x="502920" y="6473952"/>
+            <a:ext cx="11185855" cy="256032"/>
           </a:xfrm>
           <a:prstGeom prst="rect">
             <a:avLst/>
           </a:prstGeom>
-          <a:solidFill>
-            <a:srgbClr val="FDE9E9"/>
-          </a:solidFill>
-          <a:ln w="15875">
-            <a:solidFill>
-              <a:srgbClr val="B31B1B"/>
-            </a:solidFill>
-          </a:ln>
-          <a:effectLst/>
+          <a:noFill/>
         </p:spPr>
-        <p:style>
-          <a:lnRef idx="1">
-            <a:schemeClr val="accent1"/>
-          </a:lnRef>
-          <a:fillRef idx="3">
-            <a:schemeClr val="accent1"/>
-          </a:fillRef>
-          <a:effectRef idx="2">
-            <a:schemeClr val="accent1"/>
-          </a:effectRef>
-          <a:fontRef idx="minor">
-            <a:schemeClr val="lt1"/>
-          </a:fontRef>
-        </p:style>
-        <p:txBody>
-          <a:bodyPr rtlCol="0" anchor="ctr" wrap="square" lIns="128016" rIns="128016" tIns="54864"/>
+        <p:txBody>
+          <a:bodyPr wrap="square">
+            <a:spAutoFit/>
+          </a:bodyPr>
           <a:lstStyle/>
           <a:p>
             <a:pPr algn="l">
               <a:lnSpc>
-                <a:spcPct val="100000"/>
+                <a:spcPct val="95000"/>
               </a:lnSpc>
               <a:spcAft>
                 <a:spcPts val="400"/>
               </a:spcAft>
             </a:pPr>
             <a:r>
-              <a:rPr sz="1100" b="0">
-                <a:solidFill>
-                  <a:srgbClr val="1F3B63"/>
+              <a:rPr sz="950" b="0">
+                <a:solidFill>
+                  <a:srgbClr val="595959"/>
                 </a:solidFill>
               </a:rPr>
-              <a:t>Statistics caveat: n=3 per group means the unit of inference is the mouse, not the cell. I will analyse cells nested within mouse and report mouse-level effects. Treat Experiment 1 as descriptive; if QC passes I would extend to n=5 per group.</a:t>
+              <a:t>Base panel content read from the 10x gene_panel.json for Xenium_V1_FF_Mouse_Brain_MultiSection_1 (248 targets + 27 negative controls). Cap and exogenous-target rules: 10x CG000643 / CG000683. Full match table: outputs/Xenium_addon_vs_base_panel.csv</a:t>
             </a:r>
           </a:p>
         </p:txBody>
@@ -21097,7 +22457,7 @@
                             <a:srgbClr val="1F3B63"/>
                           </a:solidFill>
                         </a:rPr>
-                        <a:t>Cross-check the 168 genes against base panel content; quote Prime 5K vs base + 100 add-on.</a:t>
+                        <a:t>Choose which priority-2 genes fill the 49 spare add-on slots. The cross-check against the base panel is already done.</a:t>
                       </a:r>
                     </a:p>
                   </a:txBody>
@@ -21123,7 +22483,7 @@
                             <a:srgbClr val="1F3B63"/>
                           </a:solidFill>
                         </a:rPr>
-                        <a:t>Pilot QC passed.</a:t>
+                        <a:t>Pilot QC passed. This is now a scientific choice, not a feasibility question.</a:t>
                       </a:r>
                     </a:p>
                   </a:txBody>
@@ -21177,7 +22537,7 @@
                             <a:srgbClr val="1F3B63"/>
                           </a:solidFill>
                         </a:rPr>
-                        <a:t>Submit panel design, including the 4 transgene FASTA sequences (tdTomato, iCre, and EGFP/WPRE if wanted).</a:t>
+                        <a:t>Submit the design: base Mouse Brain panel + ~85-gene add-on, including FASTA for tdTomato and iCre.</a:t>
                       </a:r>
                     </a:p>
                   </a:txBody>
@@ -21203,7 +22563,7 @@
                             <a:srgbClr val="1F3B63"/>
                           </a:solidFill>
                         </a:rPr>
-                        <a:t>Budget option chosen; Ai14 and TRAP2 construct sequences in hand.</a:t>
+                        <a:t>Ai14 tdTomato and Fos2A-iCreER sequences in hand — request these now, they are the one item with no substitute.</a:t>
                       </a:r>
                     </a:p>
                   </a:txBody>
@@ -21337,7 +22697,7 @@
                             <a:srgbClr val="1F3B63"/>
                           </a:solidFill>
                         </a:rPr>
-                        <a:t>Run the behaviour cohort for Experiment 1 (n=3+3) so tissue is ready when the panel arrives.</a:t>
+                        <a:t>Run the behaviour cohort for Experiment 1 (n=4+4) so tissue is ready when the panel arrives.</a:t>
                       </a:r>
                     </a:p>
                   </a:txBody>
@@ -21363,7 +22723,7 @@
                             <a:srgbClr val="1F3B63"/>
                           </a:solidFill>
                         </a:rPr>
-                        <a:t>Mice genotyped TRAP2;Ai14; 4-OHT prepared fresh.</a:t>
+                        <a:t>Mice genotyped TRAP2;Ai14; single-housed from day 10; 4-OHT prepared fresh.</a:t>
                       </a:r>
                     </a:p>
                   </a:txBody>
@@ -21514,7 +22874,7 @@
                   <a:srgbClr val="1F3B63"/>
                 </a:solidFill>
               </a:rPr>
-              <a:t>The one thing that can slip this schedule is the panel cross-check. If we discover in October that our genes do not fit the cap, we lose the manufacturing slot.</a:t>
+              <a:t>The critical path is now the two transgene sequences, not the gene list. Advanced custom design has a longer queue than a standard add-on, so the FASTA files need to be in hand before we submit in October.</a:t>
             </a:r>
           </a:p>
         </p:txBody>
@@ -22025,7 +23385,7 @@
           <p:nvPr/>
         </p:nvGraphicFramePr>
         <p:xfrm>
-          <a:off x="502920" y="3227832"/>
+          <a:off x="502920" y="3584448"/>
           <a:ext cx="7680958" cy="1197864"/>
         </p:xfrm>
         <a:graphic>
@@ -22476,7 +23836,7 @@
         </p:nvSpPr>
         <p:spPr>
           <a:xfrm>
-            <a:off x="8458200" y="3227832"/>
+            <a:off x="8458200" y="3584448"/>
             <a:ext cx="3227832" cy="1508760"/>
           </a:xfrm>
           <a:prstGeom prst="rect">
